--- a/research-wiki/presentations/2026-06-results-report/flirds-results-2026-06.pptx
+++ b/research-wiki/presentations/2026-06-results-report/flirds-results-2026-06.pptx
@@ -3364,7 +3364,7 @@
                 </a:solidFill>
                 <a:latin typeface="Malgun Gothic"/>
               </a:rPr>
-              <a:t>PHASE 2 · SILO5 N=5 (1B)</a:t>
+              <a:t>LLM ROBUSTNESS · CROSS-SILO (N=5, 1B)</a:t>
             </a:r>
           </a:p>
         </p:txBody>
@@ -3399,7 +3399,7 @@
                 </a:solidFill>
                 <a:latin typeface="Malgun Gothic"/>
               </a:rPr>
-              <a:t>탐지 AUROC · fidelity Spearman vs (b) · 런타임</a:t>
+              <a:t>탐지 AUROC · fidelity Spearman vs in-run oracle · 런타임</a:t>
             </a:r>
           </a:p>
         </p:txBody>
@@ -3675,7 +3675,7 @@
                           </a:solidFill>
                           <a:latin typeface="Malgun Gothic"/>
                         </a:rPr>
-                        <a:t>(b)oracle</a:t>
+                        <a:t>in-run oracle</a:t>
                       </a:r>
                     </a:p>
                   </a:txBody>
@@ -6235,7 +6235,7 @@
                 </a:solidFill>
                 <a:latin typeface="Malgun Gothic"/>
               </a:rPr>
-              <a:t>PHASE 2 · DEVICE100 N=100 (1B)</a:t>
+              <a:t>LLM ROBUSTNESS · CROSS-DEVICE (N=100, 1B)</a:t>
             </a:r>
           </a:p>
         </p:txBody>
@@ -8209,7 +8209,7 @@
                 </a:solidFill>
                 <a:latin typeface="Malgun Gothic"/>
               </a:rPr>
-              <a:t>        anchor α=0.5서 GTG +0.78·FedSV +0.75·ShapleyFL +0.58·FedIF +0.72 (vs (b) per-round exact).</a:t>
+              <a:t>        reference point α=0.5서 GTG +0.78·FedSV +0.75·ShapleyFL +0.58·FedIF +0.72 (vs in-run oracle per-round exact).</a:t>
             </a:r>
           </a:p>
           <a:p>
@@ -8228,7 +8228,7 @@
                 </a:solidFill>
                 <a:latin typeface="Malgun Gothic"/>
               </a:rPr>
-              <a:t>poison(install config): Flirds AUROC 1.0(both α), 1차도 α=0서 1.0 — silo5와 달리 cross-device에선 1차가 회피되지 않음.</a:t>
+              <a:t>poison(install config): Flirds AUROC 1.0(both α), 1차도 α=0서 1.0 — cross-silo와 달리 cross-device에선 1차가 회피되지 않음.</a:t>
             </a:r>
           </a:p>
         </p:txBody>
@@ -8263,7 +8263,7 @@
                 </a:solidFill>
                 <a:latin typeface="Malgun Gothic"/>
               </a:rPr>
-              <a:t>device100 φ는 한 번이라도 선택된 클라만 기록(K=10/R=30 → ~96–98/100). 출처: RESULTS.md.</a:t>
+              <a:t>cross-device φ는 한 번이라도 선택된 클라만 기록(K=10/R=30 → ~96–98/100). 출처: RESULTS.md.</a:t>
             </a:r>
           </a:p>
         </p:txBody>
@@ -8324,7 +8324,7 @@
                 </a:solidFill>
                 <a:latin typeface="Malgun Gothic"/>
               </a:rPr>
-              <a:t>PHASE 2 · 스케일 (3B, SILO5 N=5)</a:t>
+              <a:t>LLM ROBUSTNESS · 스케일 (3B, CROSS-SILO N=5)</a:t>
             </a:r>
           </a:p>
         </p:txBody>
@@ -8359,7 +8359,7 @@
                 </a:solidFill>
                 <a:latin typeface="Malgun Gothic"/>
               </a:rPr>
-              <a:t>Llama-3.2-3B — 탐지 AUROC · ρ vs (b) · 런타임 (seed 0)</a:t>
+              <a:t>Llama-3.2-3B — 탐지 AUROC · ρ vs in-run oracle · 런타임 (seed 0)</a:t>
             </a:r>
           </a:p>
         </p:txBody>
@@ -8635,7 +8635,7 @@
                           </a:solidFill>
                           <a:latin typeface="Malgun Gothic"/>
                         </a:rPr>
-                        <a:t>(b)oracle</a:t>
+                        <a:t>in-run oracle</a:t>
                       </a:r>
                     </a:p>
                   </a:txBody>
@@ -10336,7 +10336,7 @@
                 </a:solidFill>
                 <a:latin typeface="Malgun Gothic"/>
               </a:rPr>
-              <a:t>noisy·free-rider: Flirds ρ=+1.000 유지(1B→3B), 런타임 251s vs (b) 1240s (~5× 저렴).</a:t>
+              <a:t>noisy·free-rider: Flirds ρ=+1.000 유지(1B→3B), 런타임 251s vs in-run oracle 1240s (~5× 저렴).</a:t>
             </a:r>
           </a:p>
           <a:p>
@@ -10409,7 +10409,7 @@
                 </a:solidFill>
                 <a:latin typeface="Malgun Gothic"/>
               </a:rPr>
-              <a:t>3B는 seed 1개 → 잠정. 7B·N=10 (a)오라클은 설계상 deferred(ⓒ). 출처: RESULTS.md.</a:t>
+              <a:t>3B는 seed 1개 → 잠정. 7B·N=10 retrain oracle은 설계상 deferred(ⓒ). 출처: RESULTS.md.</a:t>
             </a:r>
           </a:p>
         </p:txBody>
@@ -10470,7 +10470,7 @@
                 </a:solidFill>
                 <a:latin typeface="Malgun Gothic"/>
               </a:rPr>
-              <a:t>TRACK D · LLM 표준무대 (IID·CLEAN)</a:t>
+              <a:t>LLM STANDARD (CLEAN·IID)</a:t>
             </a:r>
           </a:p>
         </p:txBody>
@@ -10613,7 +10613,7 @@
                           </a:solidFill>
                           <a:latin typeface="Malgun Gothic"/>
                         </a:rPr>
-                        <a:t>std20 (주 무대)</a:t>
+                        <a:t>standard (N=20, 주 무대)</a:t>
                       </a:r>
                     </a:p>
                   </a:txBody>
@@ -10636,7 +10636,7 @@
                           </a:solidFill>
                           <a:latin typeface="Malgun Gothic"/>
                         </a:rPr>
-                        <a:t>anchor5 (듀얼 오라클)</a:t>
+                        <a:t>reference (N=5, 듀얼 오라클)</a:t>
                       </a:r>
                     </a:p>
                   </a:txBody>
@@ -11039,7 +11039,7 @@
                           </a:solidFill>
                           <a:latin typeface="Malgun Gothic"/>
                         </a:rPr>
-                        <a:t>(b) per-round exact</a:t>
+                        <a:t>in-run oracle (per-round exact)</a:t>
                       </a:r>
                     </a:p>
                   </a:txBody>
@@ -11062,7 +11062,7 @@
                           </a:solidFill>
                           <a:latin typeface="Malgun Gothic"/>
                         </a:rPr>
-                        <a:t>(a) 2⁵ 재학습 + (b) + Banzhaf</a:t>
+                        <a:t>retrain oracle (2⁵) + in-run oracle + Banzhaf</a:t>
                       </a:r>
                     </a:p>
                   </a:txBody>
@@ -11249,7 +11249,7 @@
                 </a:solidFill>
                 <a:latin typeface="Malgun Gothic"/>
               </a:rPr>
-              <a:t>무대=OpenFedLLM run_sft.sh verbatim(deviation: SGD mom=0/lr1e-3 상수/r16/fp32). clean·IID → 개입은 do-no-harm parity가 기대값. 3 seed.</a:t>
+              <a:t>무대=OpenFedLLM run_sft.sh verbatim(deviation: SGD mom=0/lr1e-3 상수/r16/fp32). clean·IID → 개입은 do-no-harm parity가 기대값. 3 seed. · 내부코드 standard=std20·reference=anchor5·in-run oracle=(b)·retrain oracle=(a)</a:t>
             </a:r>
           </a:p>
         </p:txBody>
@@ -11310,7 +11310,7 @@
                 </a:solidFill>
                 <a:latin typeface="Malgun Gothic"/>
               </a:rPr>
-              <a:t>TRACK D · 1차 FIDELITY (IID·CLEAN)</a:t>
+              <a:t>LLM STANDARD (CLEAN·IID) · 1차 FIDELITY</a:t>
             </a:r>
           </a:p>
         </p:txBody>
@@ -11345,7 +11345,7 @@
                 </a:solidFill>
                 <a:latin typeface="Malgun Gothic"/>
               </a:rPr>
-              <a:t>std20 vs (b) · anchor5 vs (a) (3-seed 평균)</a:t>
+              <a:t>standard (N=20) vs in-run oracle · reference (N=5) vs retrain oracle (3-seed 평균)</a:t>
             </a:r>
           </a:p>
         </p:txBody>
@@ -11433,7 +11433,7 @@
                           </a:solidFill>
                           <a:latin typeface="Malgun Gothic"/>
                         </a:rPr>
-                        <a:t>std20 (N=20) vs (b)</a:t>
+                        <a:t>standard (N=20) vs in-run oracle</a:t>
                       </a:r>
                     </a:p>
                   </a:txBody>
@@ -12723,7 +12723,7 @@
                           </a:solidFill>
                           <a:latin typeface="Malgun Gothic"/>
                         </a:rPr>
-                        <a:t>anchor5 (N=5) vs (a)</a:t>
+                        <a:t>reference (N=5) vs retrain oracle</a:t>
                       </a:r>
                     </a:p>
                   </a:txBody>
@@ -14150,7 +14150,7 @@
                 </a:solidFill>
                 <a:latin typeface="Malgun Gothic"/>
               </a:rPr>
-              <a:t>Flirds: (b) ρ=+1.000(cosine_d 3.5e-7) · (a) ρ=+1.000 — IID·clean에선 (a)/(b) 게임이 일치 → S7의 괴리는 이질성 구동임을 확인.</a:t>
+              <a:t>Flirds: in-run oracle ρ=+1.000(cosine_d 3.5e-7) · retrain oracle ρ=+1.000 — IID·clean에선 두 오라클 게임이 일치 → S7의 괴리는 이질성 구동임을 확인.</a:t>
             </a:r>
           </a:p>
           <a:p>
@@ -14204,7 +14204,7 @@
                 </a:solidFill>
                 <a:latin typeface="Malgun Gothic"/>
               </a:rPr>
-              <a:t>anchor5는 (a) 2⁵ 재학습 오라클 기준. 출처: runs/track_d/rundirs/*/metrics.json 재집계.</a:t>
+              <a:t>reference (N=5)는 retrain oracle (2⁵) 기준. 출처: runs/track_d/rundirs/*/metrics.json 재집계.</a:t>
             </a:r>
           </a:p>
         </p:txBody>
@@ -14265,7 +14265,7 @@
                 </a:solidFill>
                 <a:latin typeface="Malgun Gothic"/>
               </a:rPr>
-              <a:t>TRACK D · 2차-① 성능 ② 수렴</a:t>
+              <a:t>LLM STANDARD (CLEAN·IID) · 2차-① 성능 ② 수렴</a:t>
             </a:r>
           </a:p>
         </p:txBody>
@@ -14300,7 +14300,7 @@
                 </a:solidFill>
                 <a:latin typeface="Malgun Gothic"/>
               </a:rPr>
-              <a:t>개입 arm — MMLU · ROUGE-L · 수렴 (std20, 3-seed 평균)</a:t>
+              <a:t>개입 arm — MMLU · ROUGE-L · 수렴 (standard N=20, 3-seed 평균)</a:t>
             </a:r>
           </a:p>
         </p:txBody>
@@ -15306,7 +15306,7 @@
                 </a:solidFill>
                 <a:latin typeface="Malgun Gothic"/>
               </a:rPr>
-              <a:t>rounds-to-target=검증손실 목표 도달 라운드(전 arm ~199/200). anchor5(N=5)도 동일 parity. 출처: 재집계.</a:t>
+              <a:t>rounds-to-target=검증손실 목표 도달 라운드(전 arm ~199/200). reference (N=5)도 동일 parity. 출처: 재집계.</a:t>
             </a:r>
           </a:p>
         </p:txBody>
@@ -15558,7 +15558,7 @@
                           </a:solidFill>
                           <a:latin typeface="Malgun Gothic"/>
                         </a:rPr>
-                        <a:t>순위 vs (b)</a:t>
+                        <a:t>순위 vs in-run oracle</a:t>
                       </a:r>
                     </a:p>
                   </a:txBody>
@@ -15604,7 +15604,7 @@
                           </a:solidFill>
                           <a:latin typeface="Malgun Gothic"/>
                         </a:rPr>
-                        <a:t>silo5·std20 +1.000 / 이미지 +0.71–1.00</a:t>
+                        <a:t>cross-silo·standard +1.000 / 이미지 +0.71–1.00</a:t>
                       </a:r>
                     </a:p>
                   </a:txBody>
@@ -15629,7 +15629,7 @@
                           </a:solidFill>
                           <a:latin typeface="Malgun Gothic"/>
                         </a:rPr>
-                        <a:t>값-거리 vs (b)</a:t>
+                        <a:t>값-거리 vs in-run oracle</a:t>
                       </a:r>
                     </a:p>
                   </a:txBody>
@@ -15675,7 +15675,7 @@
                           </a:solidFill>
                           <a:latin typeface="Malgun Gothic"/>
                         </a:rPr>
-                        <a:t>euclid_d: 이미지 ~0.5× · std20 cosine 125×</a:t>
+                        <a:t>euclid_d: 이미지 ~0.5× · standard cosine 125×</a:t>
                       </a:r>
                     </a:p>
                   </a:txBody>
@@ -15700,7 +15700,7 @@
                           </a:solidFill>
                           <a:latin typeface="Malgun Gothic"/>
                         </a:rPr>
-                        <a:t>순위 vs (a) 재학습</a:t>
+                        <a:t>순위 vs retrain oracle</a:t>
                       </a:r>
                     </a:p>
                   </a:txBody>
@@ -15723,7 +15723,7 @@
                           </a:solidFill>
                           <a:latin typeface="Malgun Gothic"/>
                         </a:rPr>
-                        <a:t>IID·clean은 +1.000 일치; label_skew(이질성)에서 (b)와 괴리(−)</a:t>
+                        <a:t>IID·clean은 +1.000 일치; label_skew(이질성)에서 in-run oracle와 괴리(−)</a:t>
                       </a:r>
                     </a:p>
                   </a:txBody>
@@ -15746,7 +15746,7 @@
                           </a:solidFill>
                           <a:latin typeface="Malgun Gothic"/>
                         </a:rPr>
-                        <a:t>anchor5 +1.000 / 이미지 label_skew −0.18~−0.29</a:t>
+                        <a:t>reference (N=5) +1.000 / 이미지 label_skew −0.18~−0.29</a:t>
                       </a:r>
                     </a:p>
                   </a:txBody>
@@ -15794,7 +15794,7 @@
                           </a:solidFill>
                           <a:latin typeface="Malgun Gothic"/>
                         </a:rPr>
-                        <a:t>Flirds 1 HVP/round; (b) exact의 5–15× 저렴, 동일 순위</a:t>
+                        <a:t>Flirds 1 HVP/round; in-run oracle exact의 5–15× 저렴, 동일 순위</a:t>
                       </a:r>
                     </a:p>
                   </a:txBody>
@@ -15817,7 +15817,7 @@
                           </a:solidFill>
                           <a:latin typeface="Malgun Gothic"/>
                         </a:rPr>
-                        <a:t>silo5 106s vs 530s · 3B 251s vs 1240s</a:t>
+                        <a:t>cross-silo 106s vs 530s · 3B 251s vs 1240s</a:t>
                       </a:r>
                     </a:p>
                   </a:txBody>
@@ -15888,7 +15888,7 @@
                 </a:solidFill>
                 <a:latin typeface="Malgun Gothic"/>
               </a:rPr>
-              <a:t>Flirds는 (b) in-run 게임을 순위·값 모두에서 충실히, exact 대비 저비용으로 재현한다. 2차항의 고유 기여는</a:t>
+              <a:t>Flirds는 in-run oracle 게임을 순위·값 모두에서 충실히, exact 대비 저비용으로 재현한다. 2차항의 고유 기여는</a:t>
             </a:r>
           </a:p>
           <a:p>
@@ -15907,7 +15907,7 @@
                 </a:solidFill>
                 <a:latin typeface="Malgun Gothic"/>
               </a:rPr>
-              <a:t>순위가 아니라 값-크기 정밀도. (a) 재학습 게임과의 일치는 데이터 이질성에 의존 — 동질이면 일치, label_skew면 갈림.</a:t>
+              <a:t>순위가 아니라 값-크기 정밀도. retrain oracle 게임과의 일치는 데이터 이질성에 의존 — 동질이면 일치, label_skew면 갈림.</a:t>
             </a:r>
           </a:p>
         </p:txBody>
@@ -15942,7 +15942,7 @@
                 </a:solidFill>
                 <a:latin typeface="Malgun Gothic"/>
               </a:rPr>
-              <a:t>(a) 괴리는 Flirds 특정 오차가 아니라 모든 in-run 방법 공유. 상세 S6·S7·S14.</a:t>
+              <a:t>retrain oracle 괴리는 Flirds 특정 오차가 아니라 모든 in-run 방법 공유. 상세 S6·S7·S14.</a:t>
             </a:r>
           </a:p>
         </p:txBody>
@@ -16241,7 +16241,7 @@
                           </a:solidFill>
                           <a:latin typeface="Malgun Gothic"/>
                         </a:rPr>
-                        <a:t>IID·clean(Track D)서 전 arm 동일 수렴(rounds→target ~199/200, parity). 고칠 오염 없을 때 가중이 수렴을 해치지 않음.</a:t>
+                        <a:t>IID·clean(LLM standard)서 전 arm 동일 수렴(rounds→target ~199/200, parity). 고칠 오염 없을 때 가중이 수렴을 해치지 않음.</a:t>
                       </a:r>
                     </a:p>
                   </a:txBody>
@@ -16612,7 +16612,7 @@
                           </a:solidFill>
                           <a:latin typeface="Malgun Gothic"/>
                         </a:rPr>
-                        <a:t>(a)/(b) 게임 괴리</a:t>
+                        <a:t>오라클 게임 괴리 (retrain↔in-run)</a:t>
                       </a:r>
                     </a:p>
                   </a:txBody>
@@ -16871,7 +16871,7 @@
                           </a:solidFill>
                           <a:latin typeface="Malgun Gothic"/>
                         </a:rPr>
-                        <a:t>Track D 3B/7B · LLM N=10 (a)오라클 · 7B 전반 — 설계상 보류.</a:t>
+                        <a:t>LLM standard 3B/7B · LLM N=10 retrain oracle · 7B 전반 — 설계상 보류.</a:t>
                       </a:r>
                     </a:p>
                   </a:txBody>
@@ -16942,7 +16942,7 @@
                 </a:solidFill>
                 <a:latin typeface="Malgun Gothic"/>
               </a:rPr>
-              <a:t>  1차: (a)/(b) 괴리 규명(φ 직접 분석, 희귀라벨 가설) — 핵심질문 위계상 우선.</a:t>
+              <a:t>  1차: 오라클 게임 괴리(retrain↔in-run) 규명(φ 직접 분석, 희귀라벨 가설) — 핵심질문 위계상 우선.</a:t>
             </a:r>
           </a:p>
           <a:p>
@@ -17320,7 +17320,7 @@
                           </a:solidFill>
                           <a:latin typeface="Malgun Gothic"/>
                         </a:rPr>
-                        <a:t>이미지 (Track C)</a:t>
+                        <a:t>Image (CNN)</a:t>
                       </a:r>
                     </a:p>
                   </a:txBody>
@@ -17366,7 +17366,7 @@
                           </a:solidFill>
                           <a:latin typeface="Malgun Gothic"/>
                         </a:rPr>
-                        <a:t>N=10 (C1) · N=100 (C2)</a:t>
+                        <a:t>N=10 (fidelity) · N=100 (intervention)</a:t>
                       </a:r>
                     </a:p>
                   </a:txBody>
@@ -17435,7 +17435,7 @@
                           </a:solidFill>
                           <a:latin typeface="Malgun Gothic"/>
                         </a:rPr>
-                        <a:t>fidelity (a)+(b) · 개입 8arm</a:t>
+                        <a:t>fidelity (retrain+in-run oracle) · 개입 8arm</a:t>
                       </a:r>
                     </a:p>
                   </a:txBody>
@@ -17460,7 +17460,7 @@
                           </a:solidFill>
                           <a:latin typeface="Malgun Gothic"/>
                         </a:rPr>
-                        <a:t>LLM 위협매트릭스 (Phase 2)</a:t>
+                        <a:t>LLM robustness</a:t>
                       </a:r>
                     </a:p>
                   </a:txBody>
@@ -17506,7 +17506,7 @@
                           </a:solidFill>
                           <a:latin typeface="Malgun Gothic"/>
                         </a:rPr>
-                        <a:t>N=5 silo · N=100 device(α)</a:t>
+                        <a:t>N=5 cross-silo · N=100 cross-device(α)</a:t>
                       </a:r>
                     </a:p>
                   </a:txBody>
@@ -17600,7 +17600,7 @@
                           </a:solidFill>
                           <a:latin typeface="Malgun Gothic"/>
                         </a:rPr>
-                        <a:t>LLM 표준무대 (Track D)</a:t>
+                        <a:t>LLM standard (clean·IID)</a:t>
                       </a:r>
                     </a:p>
                   </a:txBody>
@@ -17646,7 +17646,7 @@
                           </a:solidFill>
                           <a:latin typeface="Malgun Gothic"/>
                         </a:rPr>
-                        <a:t>N=20 (std) · N=5 (anchor)</a:t>
+                        <a:t>N=20 standard · N=5 reference</a:t>
                       </a:r>
                     </a:p>
                   </a:txBody>
@@ -17824,7 +17824,7 @@
                 </a:solidFill>
                 <a:latin typeface="Malgun Gothic"/>
               </a:rPr>
-              <a:t>비교 대상 11종 + 탐지기 4종 / 듀얼 오라클: (a) 재학습-검증손실, (b) in-run 분해(exact 2ᴺ).</a:t>
+              <a:t>비교 대상 11종 + 탐지기 4종 / 듀얼 오라클: retrain oracle(부분집합 재학습→검증손실), in-run oracle(학습궤적 exact 2ᴺ 분해).</a:t>
             </a:r>
           </a:p>
         </p:txBody>
@@ -19027,7 +19027,7 @@
                 </a:solidFill>
                 <a:latin typeface="Malgun Gothic"/>
               </a:rPr>
-              <a:t>(b) in-run 분해</a:t>
+              <a:t>in-run oracle</a:t>
             </a:r>
           </a:p>
           <a:p>
@@ -19103,7 +19103,7 @@
                 </a:solidFill>
                 <a:latin typeface="Malgun Gothic"/>
               </a:rPr>
-              <a:t>(a) 재학습-검증손실</a:t>
+              <a:t>retrain oracle</a:t>
             </a:r>
           </a:p>
           <a:p>
@@ -19179,7 +19179,7 @@
                 </a:solidFill>
                 <a:latin typeface="Malgun Gothic"/>
               </a:rPr>
-              <a:t>핵심: Flirds는 (b) 게임의 추정량.</a:t>
+              <a:t>핵심: Flirds는 in-run oracle 게임의 추정량.</a:t>
             </a:r>
           </a:p>
           <a:p>
@@ -19198,7 +19198,7 @@
                 </a:solidFill>
                 <a:latin typeface="Malgun Gothic"/>
               </a:rPr>
-              <a:t>(a)와의 일치 여부는 'in-run 게임 = 재학습 게임'인지를</a:t>
+              <a:t>retrain oracle와의 일치 여부는 'in-run 게임 = 재학습 게임'인지를</a:t>
             </a:r>
           </a:p>
           <a:p>
@@ -20077,7 +20077,7 @@
                 </a:solidFill>
                 <a:latin typeface="Malgun Gothic"/>
               </a:rPr>
-              <a:t>TRACK C · 이미지 (CNN)</a:t>
+              <a:t>IMAGE (CNN)</a:t>
             </a:r>
           </a:p>
         </p:txBody>
@@ -20112,7 +20112,7 @@
                 </a:solidFill>
                 <a:latin typeface="Malgun Gothic"/>
               </a:rPr>
-              <a:t>실험 명세 — C1 fidelity / C2 개입</a:t>
+              <a:t>실험 명세 — fidelity / intervention</a:t>
             </a:r>
           </a:p>
         </p:txBody>
@@ -20220,7 +20220,7 @@
                           </a:solidFill>
                           <a:latin typeface="Malgun Gothic"/>
                         </a:rPr>
-                        <a:t>C1 — fidelity</a:t>
+                        <a:t>fidelity</a:t>
                       </a:r>
                     </a:p>
                   </a:txBody>
@@ -20243,7 +20243,7 @@
                           </a:solidFill>
                           <a:latin typeface="Malgun Gothic"/>
                         </a:rPr>
-                        <a:t>C2 — 개입(일반 성능·탐지)</a:t>
+                        <a:t>intervention (일반 성능·탐지)</a:t>
                       </a:r>
                     </a:p>
                   </a:txBody>
@@ -20717,7 +20717,7 @@
                           </a:solidFill>
                           <a:latin typeface="Malgun Gothic"/>
                         </a:rPr>
-                        <a:t>(b) exact 2¹⁰ + (a) 2¹⁰ 재학습</a:t>
+                        <a:t>in-run oracle (exact 2¹⁰) + retrain oracle (2¹⁰)</a:t>
                       </a:r>
                     </a:p>
                   </a:txBody>
@@ -20856,7 +20856,7 @@
                 </a:solidFill>
                 <a:latin typeface="Malgun Gothic"/>
               </a:rPr>
-              <a:t>3 seed(0,1,2), 150셀 실패 0. (a)-오라클 efficiency-gap ≤1e-15 (전 셀). 환경: conda lora4cl, RTX 3090.</a:t>
+              <a:t>3 seed(0,1,2), 150셀 실패 0. retrain oracle efficiency-gap ≤1e-15 (전 셀). 환경: conda lora4cl, RTX 3090. · 내부코드 fidelity=C1·intervention=C2·in-run oracle=(b)·retrain oracle=(a)</a:t>
             </a:r>
           </a:p>
         </p:txBody>
@@ -20917,7 +20917,7 @@
                 </a:solidFill>
                 <a:latin typeface="Malgun Gothic"/>
               </a:rPr>
-              <a:t>TRACK C · 1차 FIDELITY</a:t>
+              <a:t>IMAGE (CNN) · 1차 FIDELITY</a:t>
             </a:r>
           </a:p>
         </p:txBody>
@@ -20952,7 +20952,7 @@
                 </a:solidFill>
                 <a:latin typeface="Malgun Gothic"/>
               </a:rPr>
-              <a:t>C1 — (b) in-run 오라클 대비 (순위 Spearman, 3-seed 평균)</a:t>
+              <a:t>fidelity — in-run oracle 대비 (순위 Spearman, 3-seed 평균)</a:t>
             </a:r>
           </a:p>
         </p:txBody>
@@ -23086,7 +23086,7 @@
                 </a:solidFill>
                 <a:latin typeface="Malgun Gothic"/>
               </a:rPr>
-              <a:t>iid·feature_noise는 (b)오라클 자체 신호가 약함(클라 동질). 거리 지표는 S4 정의. 출처: runs/track_c/c1/*/metrics.json 재집계.</a:t>
+              <a:t>iid·feature_noise는 in-run oracle 자체 신호가 약함(클라 동질). 거리 지표는 S4 정의. 출처: runs/track_c/c1/*/metrics.json 재집계.</a:t>
             </a:r>
           </a:p>
         </p:txBody>
@@ -23147,7 +23147,7 @@
                 </a:solidFill>
                 <a:latin typeface="Malgun Gothic"/>
               </a:rPr>
-              <a:t>TRACK C · 1차 FIDELITY</a:t>
+              <a:t>IMAGE (CNN) · 1차 FIDELITY</a:t>
             </a:r>
           </a:p>
         </p:txBody>
@@ -23182,7 +23182,7 @@
                 </a:solidFill>
                 <a:latin typeface="Malgun Gothic"/>
               </a:rPr>
-              <a:t>C1 — (a) 2¹⁰-재학습 오라클 대비, 그리고 (b)와의 괴리</a:t>
+              <a:t>fidelity — retrain oracle (2¹⁰) 대비, 그리고 in-run oracle와의 괴리</a:t>
             </a:r>
           </a:p>
         </p:txBody>
@@ -23293,7 +23293,7 @@
                           </a:solidFill>
                           <a:latin typeface="Malgun Gothic"/>
                         </a:rPr>
-                        <a:t>Flirds (b)</a:t>
+                        <a:t>Flirds (in-run)</a:t>
                       </a:r>
                     </a:p>
                   </a:txBody>
@@ -23316,7 +23316,7 @@
                           </a:solidFill>
                           <a:latin typeface="Malgun Gothic"/>
                         </a:rPr>
-                        <a:t>Flirds (a)</a:t>
+                        <a:t>Flirds (retrain)</a:t>
                       </a:r>
                     </a:p>
                   </a:txBody>
@@ -23339,7 +23339,7 @@
                           </a:solidFill>
                           <a:latin typeface="Malgun Gothic"/>
                         </a:rPr>
-                        <a:t>Flirds1st (a)</a:t>
+                        <a:t>Flirds1st (retrain)</a:t>
                       </a:r>
                     </a:p>
                   </a:txBody>
@@ -23362,7 +23362,7 @@
                           </a:solidFill>
                           <a:latin typeface="Malgun Gothic"/>
                         </a:rPr>
-                        <a:t>GTG (a)</a:t>
+                        <a:t>GTG (retrain)</a:t>
                       </a:r>
                     </a:p>
                   </a:txBody>
@@ -23385,7 +23385,7 @@
                           </a:solidFill>
                           <a:latin typeface="Malgun Gothic"/>
                         </a:rPr>
-                        <a:t>loss-heur (a)</a:t>
+                        <a:t>loss-heur (retrain)</a:t>
                       </a:r>
                     </a:p>
                   </a:txBody>
@@ -24856,7 +24856,7 @@
                 </a:solidFill>
                 <a:latin typeface="Malgun Gothic"/>
               </a:rPr>
-              <a:t>Flirds는 (b) in-run 게임을 거의 완벽 재현하나,</a:t>
+              <a:t>Flirds는 in-run oracle 게임을 거의 완벽 재현하나,</a:t>
             </a:r>
           </a:p>
           <a:p>
@@ -24875,7 +24875,7 @@
                 </a:solidFill>
                 <a:latin typeface="Malgun Gothic"/>
               </a:rPr>
-              <a:t>label_skew에서 (b)와 (a)가 갈린다:</a:t>
+              <a:t>label_skew에서 in-run과 retrain oracle가 갈린다:</a:t>
             </a:r>
           </a:p>
           <a:p>
@@ -24894,7 +24894,7 @@
                 </a:solidFill>
                 <a:latin typeface="Malgun Gothic"/>
               </a:rPr>
-              <a:t>  CIFAR·label_skew : (b)+0.98 → (a)−0.18</a:t>
+              <a:t>  CIFAR·label_skew : in-run +0.98 → retrain −0.18</a:t>
             </a:r>
           </a:p>
           <a:p>
@@ -24913,7 +24913,7 @@
                 </a:solidFill>
                 <a:latin typeface="Malgun Gothic"/>
               </a:rPr>
-              <a:t>  MNIST·label_skew : (b)+0.71 → (a)−0.29</a:t>
+              <a:t>  MNIST·label_skew : in-run +0.71 → retrain −0.29</a:t>
             </a:r>
           </a:p>
           <a:p>
@@ -25008,7 +25008,7 @@
                 </a:solidFill>
                 <a:latin typeface="Malgun Gothic"/>
               </a:rPr>
-              <a:t>(iid 음수는 (a)신호 자체가 미약 → 노이즈)</a:t>
+              <a:t>(iid 음수는 retrain oracle 신호 자체가 미약 → 노이즈)</a:t>
             </a:r>
           </a:p>
         </p:txBody>
@@ -25043,7 +25043,7 @@
                 </a:solidFill>
                 <a:latin typeface="Malgun Gothic"/>
               </a:rPr>
-              <a:t>(a) 열은 rho_a_mean(3-seed). 동일 시나리오에서 Track D anchor5(IID·clean LLM)는 (a)와 +1.000 일치 → 괴리는 이질성 구동(S14).</a:t>
+              <a:t>retrain 열은 rho_a_mean(3-seed). 동일 시나리오에서 LLM standard의 reference (N=5)는 retrain oracle와 +1.000 일치 → 괴리는 이질성 구동(S14).</a:t>
             </a:r>
           </a:p>
         </p:txBody>
@@ -25104,7 +25104,7 @@
                 </a:solidFill>
                 <a:latin typeface="Malgun Gothic"/>
               </a:rPr>
-              <a:t>TRACK C · 2차-① 성능·③ 탐지</a:t>
+              <a:t>IMAGE (CNN) · 2차-① 성능·③ 탐지</a:t>
             </a:r>
           </a:p>
         </p:txBody>
@@ -25139,7 +25139,7 @@
                 </a:solidFill>
                 <a:latin typeface="Malgun Gothic"/>
               </a:rPr>
-              <a:t>C2 — 개입 결과 (CIFAR-10, dir1, 3-seed 평균)</a:t>
+              <a:t>intervention — 개입 결과 (CIFAR-10, dir1, 3-seed 평균)</a:t>
             </a:r>
           </a:p>
         </p:txBody>
@@ -26127,7 +26127,7 @@
                 </a:solidFill>
                 <a:latin typeface="Malgun Gothic"/>
               </a:rPr>
-              <a:t>PHASE 2 · LLM 위협매트릭스</a:t>
+              <a:t>LLM ROBUSTNESS</a:t>
             </a:r>
           </a:p>
         </p:txBody>
@@ -26270,7 +26270,7 @@
                           </a:solidFill>
                           <a:latin typeface="Malgun Gothic"/>
                         </a:rPr>
-                        <a:t>silo5 (cross-silo)</a:t>
+                        <a:t>cross-silo (N=5)</a:t>
                       </a:r>
                     </a:p>
                   </a:txBody>
@@ -26293,7 +26293,7 @@
                           </a:solidFill>
                           <a:latin typeface="Malgun Gothic"/>
                         </a:rPr>
-                        <a:t>device100 (cross-device)</a:t>
+                        <a:t>cross-device (N=100)</a:t>
                       </a:r>
                     </a:p>
                   </a:txBody>
@@ -26838,7 +26838,7 @@
                           </a:solidFill>
                           <a:latin typeface="Malgun Gothic"/>
                         </a:rPr>
-                        <a:t>(b) exact 2⁵</a:t>
+                        <a:t>in-run oracle (exact 2⁵)</a:t>
                       </a:r>
                     </a:p>
                   </a:txBody>
@@ -26861,7 +26861,7 @@
                           </a:solidFill>
                           <a:latin typeface="Malgun Gothic"/>
                         </a:rPr>
-                        <a:t>(b) per-round exact (α=0.5 anchor만)</a:t>
+                        <a:t>in-run oracle (per-round exact, reference point α=0.5)</a:t>
                       </a:r>
                     </a:p>
                   </a:txBody>
@@ -26977,7 +26977,7 @@
                 </a:solidFill>
                 <a:latin typeface="Malgun Gothic"/>
               </a:rPr>
-              <a:t>LoRA 어댑터, attn=eager(전진모드 AD 위해). silo5/3B 3seed (3B는 1seed). device100 α별 1–3seed. off-anchor truth=Flirds proxy(α=0.5서 (b)와 +1.000 검증).</a:t>
+              <a:t>LoRA 어댑터, attn=eager(전진모드 AD 위해). cross-silo/3B 3seed (3B는 1seed). cross-device α별 1–3seed. 기준점 외 α는 Flirds proxy(reference point α=0.5서 in-run oracle와 +1.000 검증). · 내부코드 cross-silo=silo5·cross-device=device100</a:t>
             </a:r>
           </a:p>
         </p:txBody>

--- a/research-wiki/presentations/2026-06-results-report/flirds-results-2026-06.pptx
+++ b/research-wiki/presentations/2026-06-results-report/flirds-results-2026-06.pptx
@@ -3399,7 +3399,7 @@
                 </a:solidFill>
                 <a:latin typeface="Malgun Gothic"/>
               </a:rPr>
-              <a:t>탐지 AUROC · fidelity Spearman vs in-run oracle · 런타임</a:t>
+              <a:t>탐지 AUROC ↑ · fidelity Spearman ↑ vs in-run oracle · 런타임 ↓</a:t>
             </a:r>
           </a:p>
         </p:txBody>
@@ -3512,7 +3512,7 @@
                           </a:solidFill>
                           <a:latin typeface="Malgun Gothic"/>
                         </a:rPr>
-                        <a:t>noisy</a:t>
+                        <a:t>noisy ↑</a:t>
                       </a:r>
                     </a:p>
                   </a:txBody>
@@ -3535,7 +3535,7 @@
                           </a:solidFill>
                           <a:latin typeface="Malgun Gothic"/>
                         </a:rPr>
-                        <a:t>fr-rand</a:t>
+                        <a:t>fr-rand ↑</a:t>
                       </a:r>
                     </a:p>
                   </a:txBody>
@@ -3558,7 +3558,7 @@
                           </a:solidFill>
                           <a:latin typeface="Malgun Gothic"/>
                         </a:rPr>
-                        <a:t>fr-zero</a:t>
+                        <a:t>fr-zero ↑</a:t>
                       </a:r>
                     </a:p>
                   </a:txBody>
@@ -3581,7 +3581,7 @@
                           </a:solidFill>
                           <a:latin typeface="Malgun Gothic"/>
                         </a:rPr>
-                        <a:t>poison</a:t>
+                        <a:t>poison ↑</a:t>
                       </a:r>
                     </a:p>
                   </a:txBody>
@@ -3604,7 +3604,7 @@
                           </a:solidFill>
                           <a:latin typeface="Malgun Gothic"/>
                         </a:rPr>
-                        <a:t>ρ noisy</a:t>
+                        <a:t>ρ noisy ↑</a:t>
                       </a:r>
                     </a:p>
                   </a:txBody>
@@ -3627,7 +3627,7 @@
                           </a:solidFill>
                           <a:latin typeface="Malgun Gothic"/>
                         </a:rPr>
-                        <a:t>ρ poison</a:t>
+                        <a:t>ρ poison ↑</a:t>
                       </a:r>
                     </a:p>
                   </a:txBody>
@@ -3650,7 +3650,7 @@
                           </a:solidFill>
                           <a:latin typeface="Malgun Gothic"/>
                         </a:rPr>
-                        <a:t>런타임</a:t>
+                        <a:t>런타임 ↓</a:t>
                       </a:r>
                     </a:p>
                   </a:txBody>
@@ -6270,7 +6270,7 @@
                 </a:solidFill>
                 <a:latin typeface="Malgun Gothic"/>
               </a:rPr>
-              <a:t>α-sweep — 탐지 AUROC</a:t>
+              <a:t>α-sweep — 탐지 AUROC ↑</a:t>
             </a:r>
           </a:p>
         </p:txBody>
@@ -6358,7 +6358,7 @@
                           </a:solidFill>
                           <a:latin typeface="Malgun Gothic"/>
                         </a:rPr>
-                        <a:t>방법 (noisy)</a:t>
+                        <a:t>방법 (noisy AUROC ↑)</a:t>
                       </a:r>
                     </a:p>
                   </a:txBody>
@@ -7505,7 +7505,7 @@
                           </a:solidFill>
                           <a:latin typeface="Malgun Gothic"/>
                         </a:rPr>
-                        <a:t>방법 (poison)</a:t>
+                        <a:t>방법 (poison AUROC ↑)</a:t>
                       </a:r>
                     </a:p>
                   </a:txBody>
@@ -8359,7 +8359,7 @@
                 </a:solidFill>
                 <a:latin typeface="Malgun Gothic"/>
               </a:rPr>
-              <a:t>Llama-3.2-3B — 탐지 AUROC · ρ vs in-run oracle · 런타임 (seed 0)</a:t>
+              <a:t>Llama-3.2-3B — 탐지 AUROC ↑ · ρ vs in-run oracle ↑ · 런타임 ↓ (seed 0)</a:t>
             </a:r>
           </a:p>
         </p:txBody>
@@ -8472,7 +8472,7 @@
                           </a:solidFill>
                           <a:latin typeface="Malgun Gothic"/>
                         </a:rPr>
-                        <a:t>noisy</a:t>
+                        <a:t>noisy ↑</a:t>
                       </a:r>
                     </a:p>
                   </a:txBody>
@@ -8495,7 +8495,7 @@
                           </a:solidFill>
                           <a:latin typeface="Malgun Gothic"/>
                         </a:rPr>
-                        <a:t>fr-rand</a:t>
+                        <a:t>fr-rand ↑</a:t>
                       </a:r>
                     </a:p>
                   </a:txBody>
@@ -8518,7 +8518,7 @@
                           </a:solidFill>
                           <a:latin typeface="Malgun Gothic"/>
                         </a:rPr>
-                        <a:t>fr-zero</a:t>
+                        <a:t>fr-zero ↑</a:t>
                       </a:r>
                     </a:p>
                   </a:txBody>
@@ -8541,7 +8541,7 @@
                           </a:solidFill>
                           <a:latin typeface="Malgun Gothic"/>
                         </a:rPr>
-                        <a:t>poison</a:t>
+                        <a:t>poison ↑</a:t>
                       </a:r>
                     </a:p>
                   </a:txBody>
@@ -8564,7 +8564,7 @@
                           </a:solidFill>
                           <a:latin typeface="Malgun Gothic"/>
                         </a:rPr>
-                        <a:t>ρ noisy</a:t>
+                        <a:t>ρ noisy ↑</a:t>
                       </a:r>
                     </a:p>
                   </a:txBody>
@@ -8587,7 +8587,7 @@
                           </a:solidFill>
                           <a:latin typeface="Malgun Gothic"/>
                         </a:rPr>
-                        <a:t>ρ poison</a:t>
+                        <a:t>ρ poison ↑</a:t>
                       </a:r>
                     </a:p>
                   </a:txBody>
@@ -8610,7 +8610,7 @@
                           </a:solidFill>
                           <a:latin typeface="Malgun Gothic"/>
                         </a:rPr>
-                        <a:t>런타임</a:t>
+                        <a:t>런타임 ↓</a:t>
                       </a:r>
                     </a:p>
                   </a:txBody>
@@ -11456,7 +11456,7 @@
                           </a:solidFill>
                           <a:latin typeface="Malgun Gothic"/>
                         </a:rPr>
-                        <a:t>Spearman</a:t>
+                        <a:t>Spearman ↑</a:t>
                       </a:r>
                     </a:p>
                   </a:txBody>
@@ -11479,7 +11479,7 @@
                           </a:solidFill>
                           <a:latin typeface="Malgun Gothic"/>
                         </a:rPr>
-                        <a:t>Kendall</a:t>
+                        <a:t>Kendall ↑</a:t>
                       </a:r>
                     </a:p>
                   </a:txBody>
@@ -11502,7 +11502,7 @@
                           </a:solidFill>
                           <a:latin typeface="Malgun Gothic"/>
                         </a:rPr>
-                        <a:t>cosine_d</a:t>
+                        <a:t>cosine_d ↓</a:t>
                       </a:r>
                     </a:p>
                   </a:txBody>
@@ -11525,7 +11525,7 @@
                           </a:solidFill>
                           <a:latin typeface="Malgun Gothic"/>
                         </a:rPr>
-                        <a:t>euclid_d</a:t>
+                        <a:t>euclid_d ↓</a:t>
                       </a:r>
                     </a:p>
                   </a:txBody>
@@ -11548,7 +11548,7 @@
                           </a:solidFill>
                           <a:latin typeface="Malgun Gothic"/>
                         </a:rPr>
-                        <a:t>max_diff</a:t>
+                        <a:t>max_diff ↓</a:t>
                       </a:r>
                     </a:p>
                   </a:txBody>
@@ -12746,7 +12746,7 @@
                           </a:solidFill>
                           <a:latin typeface="Malgun Gothic"/>
                         </a:rPr>
-                        <a:t>Spearman</a:t>
+                        <a:t>Spearman ↑</a:t>
                       </a:r>
                     </a:p>
                   </a:txBody>
@@ -12769,7 +12769,7 @@
                           </a:solidFill>
                           <a:latin typeface="Malgun Gothic"/>
                         </a:rPr>
-                        <a:t>Kendall</a:t>
+                        <a:t>Kendall ↑</a:t>
                       </a:r>
                     </a:p>
                   </a:txBody>
@@ -12792,7 +12792,7 @@
                           </a:solidFill>
                           <a:latin typeface="Malgun Gothic"/>
                         </a:rPr>
-                        <a:t>cosine_d</a:t>
+                        <a:t>cosine_d ↓</a:t>
                       </a:r>
                     </a:p>
                   </a:txBody>
@@ -12815,7 +12815,7 @@
                           </a:solidFill>
                           <a:latin typeface="Malgun Gothic"/>
                         </a:rPr>
-                        <a:t>euclid_d</a:t>
+                        <a:t>euclid_d ↓</a:t>
                       </a:r>
                     </a:p>
                   </a:txBody>
@@ -12838,7 +12838,7 @@
                           </a:solidFill>
                           <a:latin typeface="Malgun Gothic"/>
                         </a:rPr>
-                        <a:t>max_diff</a:t>
+                        <a:t>max_diff ↓</a:t>
                       </a:r>
                     </a:p>
                   </a:txBody>
@@ -14410,7 +14410,7 @@
                           </a:solidFill>
                           <a:latin typeface="Malgun Gothic"/>
                         </a:rPr>
-                        <a:t>MMLU (0-shot)</a:t>
+                        <a:t>MMLU (0-shot) ↑</a:t>
                       </a:r>
                     </a:p>
                   </a:txBody>
@@ -14433,7 +14433,7 @@
                           </a:solidFill>
                           <a:latin typeface="Malgun Gothic"/>
                         </a:rPr>
-                        <a:t>ROUGE-L</a:t>
+                        <a:t>ROUGE-L ↑</a:t>
                       </a:r>
                     </a:p>
                   </a:txBody>
@@ -14456,7 +14456,7 @@
                           </a:solidFill>
                           <a:latin typeface="Malgun Gothic"/>
                         </a:rPr>
-                        <a:t>final val-loss</a:t>
+                        <a:t>final val-loss ↓</a:t>
                       </a:r>
                     </a:p>
                   </a:txBody>
@@ -14479,7 +14479,7 @@
                           </a:solidFill>
                           <a:latin typeface="Malgun Gothic"/>
                         </a:rPr>
-                        <a:t>rounds→target</a:t>
+                        <a:t>rounds→target ↓</a:t>
                       </a:r>
                     </a:p>
                   </a:txBody>
@@ -19527,7 +19527,7 @@
                           </a:solidFill>
                           <a:latin typeface="Malgun Gothic"/>
                         </a:rPr>
-                        <a:t>Spearman ρ · Kendall τ</a:t>
+                        <a:t>Spearman ρ ↑ · Kendall τ ↑</a:t>
                       </a:r>
                     </a:p>
                   </a:txBody>
@@ -19598,7 +19598,7 @@
                           </a:solidFill>
                           <a:latin typeface="Malgun Gothic"/>
                         </a:rPr>
-                        <a:t>cosine_d · euclid_d · max_diff</a:t>
+                        <a:t>cosine_d ↓ · euclid_d ↓ · max_diff ↓</a:t>
                       </a:r>
                     </a:p>
                   </a:txBody>
@@ -19669,7 +19669,7 @@
                           </a:solidFill>
                           <a:latin typeface="Malgun Gothic"/>
                         </a:rPr>
-                        <a:t>test acc (이미지) · MMLU·ROUGE-L (LLM)</a:t>
+                        <a:t>test acc (이미지) ↑ · MMLU·ROUGE-L (LLM) ↑</a:t>
                       </a:r>
                     </a:p>
                   </a:txBody>
@@ -19740,7 +19740,7 @@
                           </a:solidFill>
                           <a:latin typeface="Malgun Gothic"/>
                         </a:rPr>
-                        <a:t>rounds-to-target · final val-loss</a:t>
+                        <a:t>rounds-to-target ↓ · final val-loss ↓</a:t>
                       </a:r>
                     </a:p>
                   </a:txBody>
@@ -19811,7 +19811,7 @@
                           </a:solidFill>
                           <a:latin typeface="Malgun Gothic"/>
                         </a:rPr>
-                        <a:t>AUROC</a:t>
+                        <a:t>AUROC ↑</a:t>
                       </a:r>
                     </a:p>
                   </a:txBody>
@@ -20016,7 +20016,7 @@
                 </a:solidFill>
                 <a:latin typeface="Malgun Gothic"/>
               </a:rPr>
-              <a:t>값-거리 지표는 순위가 포화(ρ=+1.000)된 구간에서 방법을 변별 — 특히 1차 vs 2차 테일러 비교에 사용.</a:t>
+              <a:t>방향 규약: ↑ 높을수록 좋음 / ↓ 낮을수록 좋음. · 값-거리 지표는 순위가 포화(ρ=+1.000)된 구간에서 방법을 변별 — 특히 1차 vs 2차 테일러 비교에 사용.</a:t>
             </a:r>
           </a:p>
         </p:txBody>
@@ -20952,7 +20952,7 @@
                 </a:solidFill>
                 <a:latin typeface="Malgun Gothic"/>
               </a:rPr>
-              <a:t>fidelity — in-run oracle 대비 (순위 Spearman, 3-seed 평균)</a:t>
+              <a:t>fidelity — in-run oracle 대비 (순위 Spearman ↑, 3-seed 평균)</a:t>
             </a:r>
           </a:p>
         </p:txBody>
@@ -25043,7 +25043,7 @@
                 </a:solidFill>
                 <a:latin typeface="Malgun Gothic"/>
               </a:rPr>
-              <a:t>retrain 열은 rho_a_mean(3-seed). 동일 시나리오에서 LLM standard의 reference (N=5)는 retrain oracle와 +1.000 일치 → 괴리는 이질성 구동(S14).</a:t>
+              <a:t>표 값 = Spearman ρ ↑. retrain 열은 rho_a_mean(3-seed). 동일 시나리오에서 LLM standard의 reference (N=5)는 retrain oracle와 +1.000 일치 → 괴리는 이질성 구동(S14).</a:t>
             </a:r>
           </a:p>
         </p:txBody>
@@ -25955,7 +25955,7 @@
                 </a:solidFill>
                 <a:latin typeface="Malgun Gothic"/>
               </a:rPr>
-              <a:t>셀당 = test acc  (탐지 AUROC).  clean은 위협 없음→AUROC 없음.</a:t>
+              <a:t>셀당 = test acc ↑  (탐지 AUROC ↑).  clean은 위협 없음→AUROC 없음.</a:t>
             </a:r>
           </a:p>
           <a:p>

--- a/research-wiki/presentations/2026-06-results-report/flirds-results-2026-06.pptx
+++ b/research-wiki/presentations/2026-06-results-report/flirds-results-2026-06.pptx
@@ -3458,7 +3458,7 @@
         </p:nvGraphicFramePr>
         <p:xfrm>
           <a:off x="502920" y="1417320"/>
-          <a:ext cx="11183111" cy="3401568"/>
+          <a:ext cx="11183111" cy="3520440"/>
         </p:xfrm>
         <a:graphic>
           <a:graphicData uri="http://schemas.openxmlformats.org/drawingml/2006/table">
@@ -3467,11 +3467,11 @@
                 <a:tableStyleId>{5940675A-B579-460E-94D1-54222C63F5DA}</a:tableStyleId>
               </a:tblPr>
               <a:tblGrid>
-                <a:gridCol w="1920332"/>
-                <a:gridCol w="5309154"/>
-                <a:gridCol w="3953625"/>
+                <a:gridCol w="2192767"/>
+                <a:gridCol w="5153002"/>
+                <a:gridCol w="3837342"/>
               </a:tblGrid>
-              <a:tr h="566928">
+              <a:tr h="502920">
                 <a:tc>
                   <a:txBody>
                     <a:bodyPr wrap="square"/>
@@ -3479,7 +3479,7 @@
                     <a:p>
                       <a:pPr algn="l"/>
                       <a:r>
-                        <a:rPr sz="1080" b="1">
+                        <a:rPr sz="1030" b="1">
                           <a:solidFill>
                             <a:srgbClr val="17508C"/>
                           </a:solidFill>
@@ -3502,7 +3502,7 @@
                     <a:p>
                       <a:pPr algn="l"/>
                       <a:r>
-                        <a:rPr sz="1080" b="1">
+                        <a:rPr sz="1030" b="1">
                           <a:solidFill>
                             <a:srgbClr val="17508C"/>
                           </a:solidFill>
@@ -3525,7 +3525,7 @@
                     <a:p>
                       <a:pPr algn="l"/>
                       <a:r>
-                        <a:rPr sz="1080" b="1">
+                        <a:rPr sz="1030" b="1">
                           <a:solidFill>
                             <a:srgbClr val="17508C"/>
                           </a:solidFill>
@@ -3542,7 +3542,7 @@
                   </a:tcPr>
                 </a:tc>
               </a:tr>
-              <a:tr h="566928">
+              <a:tr h="502920">
                 <a:tc>
                   <a:txBody>
                     <a:bodyPr wrap="square"/>
@@ -3550,13 +3550,13 @@
                     <a:p>
                       <a:pPr algn="l"/>
                       <a:r>
-                        <a:rPr sz="1080" b="1">
-                          <a:solidFill>
-                            <a:srgbClr val="1A1A1A"/>
-                          </a:solidFill>
-                          <a:latin typeface="Malgun Gothic"/>
-                        </a:rPr>
-                        <a:t>순위 vs in-run oracle</a:t>
+                        <a:rPr sz="1030" b="1">
+                          <a:solidFill>
+                            <a:srgbClr val="1A1A1A"/>
+                          </a:solidFill>
+                          <a:latin typeface="Malgun Gothic"/>
+                        </a:rPr>
+                        <a:t>순위 vs in-run oracle (Spearman)</a:t>
                       </a:r>
                     </a:p>
                   </a:txBody>
@@ -3573,7 +3573,7 @@
                     <a:p>
                       <a:pPr algn="l"/>
                       <a:r>
-                        <a:rPr sz="1080" b="0">
+                        <a:rPr sz="1030" b="0">
                           <a:solidFill>
                             <a:srgbClr val="1A1A1A"/>
                           </a:solidFill>
@@ -3596,7 +3596,7 @@
                     <a:p>
                       <a:pPr algn="l"/>
                       <a:r>
-                        <a:rPr sz="1080" b="0">
+                        <a:rPr sz="1030" b="0">
                           <a:solidFill>
                             <a:srgbClr val="1A1A1A"/>
                           </a:solidFill>
@@ -3613,7 +3613,7 @@
                   </a:tcPr>
                 </a:tc>
               </a:tr>
-              <a:tr h="566928">
+              <a:tr h="502920">
                 <a:tc>
                   <a:txBody>
                     <a:bodyPr wrap="square"/>
@@ -3621,7 +3621,78 @@
                     <a:p>
                       <a:pPr algn="l"/>
                       <a:r>
-                        <a:rPr sz="1080" b="1">
+                        <a:rPr sz="1030" b="1">
+                          <a:solidFill>
+                            <a:srgbClr val="1A1A1A"/>
+                          </a:solidFill>
+                          <a:latin typeface="Malgun Gothic"/>
+                        </a:rPr>
+                        <a:t>값-수준 상관 (Pearson)</a:t>
+                      </a:r>
+                    </a:p>
+                  </a:txBody>
+                  <a:tcPr marL="50800" marR="50800" marT="19050" marB="19050" anchor="ctr">
+                    <a:solidFill>
+                      <a:srgbClr val="FFFFFF"/>
+                    </a:solidFill>
+                  </a:tcPr>
+                </a:tc>
+                <a:tc>
+                  <a:txBody>
+                    <a:bodyPr wrap="square"/>
+                    <a:lstStyle/>
+                    <a:p>
+                      <a:pPr algn="l"/>
+                      <a:r>
+                        <a:rPr sz="1030" b="0">
+                          <a:solidFill>
+                            <a:srgbClr val="1A1A1A"/>
+                          </a:solidFill>
+                          <a:latin typeface="Malgun Gothic"/>
+                        </a:rPr>
+                        <a:t>Flirds·Banzhaf·loss-heur Pearson≈1.0; 순위 약한 ShapleyFL·FedIF·ComFedSV는 값-수준도 실패; poison선 1차 −0.95(역상관)</a:t>
+                      </a:r>
+                    </a:p>
+                  </a:txBody>
+                  <a:tcPr marL="50800" marR="50800" marT="19050" marB="19050" anchor="ctr">
+                    <a:solidFill>
+                      <a:srgbClr val="FFFFFF"/>
+                    </a:solidFill>
+                  </a:tcPr>
+                </a:tc>
+                <a:tc>
+                  <a:txBody>
+                    <a:bodyPr wrap="square"/>
+                    <a:lstStyle/>
+                    <a:p>
+                      <a:pPr algn="l"/>
+                      <a:r>
+                        <a:rPr sz="1030" b="0">
+                          <a:solidFill>
+                            <a:srgbClr val="1A1A1A"/>
+                          </a:solidFill>
+                          <a:latin typeface="Malgun Gothic"/>
+                        </a:rPr>
+                        <a:t>standard Flirds 1.00·ComFedSV 0.10 / 이미지 Flirds 0.93 / silo poison 1차 −0.95</a:t>
+                      </a:r>
+                    </a:p>
+                  </a:txBody>
+                  <a:tcPr marL="50800" marR="50800" marT="19050" marB="19050" anchor="ctr">
+                    <a:solidFill>
+                      <a:srgbClr val="FFFFFF"/>
+                    </a:solidFill>
+                  </a:tcPr>
+                </a:tc>
+              </a:tr>
+              <a:tr h="502920">
+                <a:tc>
+                  <a:txBody>
+                    <a:bodyPr wrap="square"/>
+                    <a:lstStyle/>
+                    <a:p>
+                      <a:pPr algn="l"/>
+                      <a:r>
+                        <a:rPr sz="1030" b="1">
                           <a:solidFill>
                             <a:srgbClr val="1A1A1A"/>
                           </a:solidFill>
@@ -3644,7 +3715,7 @@
                     <a:p>
                       <a:pPr algn="l"/>
                       <a:r>
-                        <a:rPr sz="1080" b="0">
+                        <a:rPr sz="1030" b="0">
                           <a:solidFill>
                             <a:srgbClr val="1A1A1A"/>
                           </a:solidFill>
@@ -3667,7 +3738,7 @@
                     <a:p>
                       <a:pPr algn="l"/>
                       <a:r>
-                        <a:rPr sz="1080" b="0">
+                        <a:rPr sz="1030" b="0">
                           <a:solidFill>
                             <a:srgbClr val="1A1A1A"/>
                           </a:solidFill>
@@ -3684,7 +3755,7 @@
                   </a:tcPr>
                 </a:tc>
               </a:tr>
-              <a:tr h="566928">
+              <a:tr h="502920">
                 <a:tc>
                   <a:txBody>
                     <a:bodyPr wrap="square"/>
@@ -3692,7 +3763,7 @@
                     <a:p>
                       <a:pPr algn="l"/>
                       <a:r>
-                        <a:rPr sz="1080" b="1">
+                        <a:rPr sz="1030" b="1">
                           <a:solidFill>
                             <a:srgbClr val="1A1A1A"/>
                           </a:solidFill>
@@ -3715,7 +3786,7 @@
                     <a:p>
                       <a:pPr algn="l"/>
                       <a:r>
-                        <a:rPr sz="1080" b="0">
+                        <a:rPr sz="1030" b="0">
                           <a:solidFill>
                             <a:srgbClr val="1A1A1A"/>
                           </a:solidFill>
@@ -3738,7 +3809,7 @@
                     <a:p>
                       <a:pPr algn="l"/>
                       <a:r>
-                        <a:rPr sz="1080" b="0">
+                        <a:rPr sz="1030" b="0">
                           <a:solidFill>
                             <a:srgbClr val="1A1A1A"/>
                           </a:solidFill>
@@ -3755,7 +3826,7 @@
                   </a:tcPr>
                 </a:tc>
               </a:tr>
-              <a:tr h="566928">
+              <a:tr h="502920">
                 <a:tc>
                   <a:txBody>
                     <a:bodyPr wrap="square"/>
@@ -3763,7 +3834,7 @@
                     <a:p>
                       <a:pPr algn="l"/>
                       <a:r>
-                        <a:rPr sz="1080" b="1">
+                        <a:rPr sz="1030" b="1">
                           <a:solidFill>
                             <a:srgbClr val="1A1A1A"/>
                           </a:solidFill>
@@ -3786,7 +3857,7 @@
                     <a:p>
                       <a:pPr algn="l"/>
                       <a:r>
-                        <a:rPr sz="1080" b="0">
+                        <a:rPr sz="1030" b="0">
                           <a:solidFill>
                             <a:srgbClr val="1A1A1A"/>
                           </a:solidFill>
@@ -3809,7 +3880,7 @@
                     <a:p>
                       <a:pPr algn="l"/>
                       <a:r>
-                        <a:rPr sz="1080" b="0">
+                        <a:rPr sz="1030" b="0">
                           <a:solidFill>
                             <a:srgbClr val="1A1A1A"/>
                           </a:solidFill>
@@ -3826,7 +3897,7 @@
                   </a:tcPr>
                 </a:tc>
               </a:tr>
-              <a:tr h="566928">
+              <a:tr h="502920">
                 <a:tc>
                   <a:txBody>
                     <a:bodyPr wrap="square"/>
@@ -3834,7 +3905,7 @@
                     <a:p>
                       <a:pPr algn="l"/>
                       <a:r>
-                        <a:rPr sz="1080" b="1">
+                        <a:rPr sz="1030" b="1">
                           <a:solidFill>
                             <a:srgbClr val="1A1A1A"/>
                           </a:solidFill>
@@ -3857,7 +3928,7 @@
                     <a:p>
                       <a:pPr algn="l"/>
                       <a:r>
-                        <a:rPr sz="1080" b="0">
+                        <a:rPr sz="1030" b="0">
                           <a:solidFill>
                             <a:srgbClr val="1A1A1A"/>
                           </a:solidFill>
@@ -3880,7 +3951,7 @@
                     <a:p>
                       <a:pPr algn="l"/>
                       <a:r>
-                        <a:rPr sz="1080" b="0">
+                        <a:rPr sz="1030" b="0">
                           <a:solidFill>
                             <a:srgbClr val="1A1A1A"/>
                           </a:solidFill>
@@ -3909,7 +3980,7 @@
         </p:nvSpPr>
         <p:spPr>
           <a:xfrm>
-            <a:off x="502920" y="5074920"/>
+            <a:off x="502920" y="5029200"/>
             <a:ext cx="11155680" cy="365760"/>
           </a:xfrm>
           <a:prstGeom prst="rect">
@@ -23912,7 +23983,7 @@
         </p:nvGraphicFramePr>
         <p:xfrm>
           <a:off x="502920" y="1371600"/>
-          <a:ext cx="11183109" cy="3744468"/>
+          <a:ext cx="11183109" cy="3447288"/>
         </p:xfrm>
         <a:graphic>
           <a:graphicData uri="http://schemas.openxmlformats.org/drawingml/2006/table">
@@ -23933,7 +24004,7 @@
                 <a:gridCol w="951754"/>
                 <a:gridCol w="951754"/>
               </a:tblGrid>
-              <a:tr h="288036">
+              <a:tr h="265176">
                 <a:tc>
                   <a:txBody>
                     <a:bodyPr wrap="square"/>
@@ -24188,7 +24259,7 @@
                   </a:tcPr>
                 </a:tc>
               </a:tr>
-              <a:tr h="288036">
+              <a:tr h="265176">
                 <a:tc>
                   <a:txBody>
                     <a:bodyPr wrap="square"/>
@@ -24443,7 +24514,7 @@
                   </a:tcPr>
                 </a:tc>
               </a:tr>
-              <a:tr h="288036">
+              <a:tr h="265176">
                 <a:tc>
                   <a:txBody>
                     <a:bodyPr wrap="square"/>
@@ -24698,7 +24769,7 @@
                   </a:tcPr>
                 </a:tc>
               </a:tr>
-              <a:tr h="288036">
+              <a:tr h="265176">
                 <a:tc>
                   <a:txBody>
                     <a:bodyPr wrap="square"/>
@@ -24953,7 +25024,7 @@
                   </a:tcPr>
                 </a:tc>
               </a:tr>
-              <a:tr h="288036">
+              <a:tr h="265176">
                 <a:tc>
                   <a:txBody>
                     <a:bodyPr wrap="square"/>
@@ -25208,7 +25279,7 @@
                   </a:tcPr>
                 </a:tc>
               </a:tr>
-              <a:tr h="288036">
+              <a:tr h="265176">
                 <a:tc>
                   <a:txBody>
                     <a:bodyPr wrap="square"/>
@@ -25463,7 +25534,7 @@
                   </a:tcPr>
                 </a:tc>
               </a:tr>
-              <a:tr h="288036">
+              <a:tr h="265176">
                 <a:tc>
                   <a:txBody>
                     <a:bodyPr wrap="square"/>
@@ -25718,7 +25789,7 @@
                   </a:tcPr>
                 </a:tc>
               </a:tr>
-              <a:tr h="288036">
+              <a:tr h="265176">
                 <a:tc>
                   <a:txBody>
                     <a:bodyPr wrap="square"/>
@@ -25973,7 +26044,7 @@
                   </a:tcPr>
                 </a:tc>
               </a:tr>
-              <a:tr h="288036">
+              <a:tr h="265176">
                 <a:tc>
                   <a:txBody>
                     <a:bodyPr wrap="square"/>
@@ -26228,7 +26299,7 @@
                   </a:tcPr>
                 </a:tc>
               </a:tr>
-              <a:tr h="288036">
+              <a:tr h="265176">
                 <a:tc>
                   <a:txBody>
                     <a:bodyPr wrap="square"/>
@@ -26483,7 +26554,7 @@
                   </a:tcPr>
                 </a:tc>
               </a:tr>
-              <a:tr h="288036">
+              <a:tr h="265176">
                 <a:tc>
                   <a:txBody>
                     <a:bodyPr wrap="square"/>
@@ -26738,7 +26809,7 @@
                   </a:tcPr>
                 </a:tc>
               </a:tr>
-              <a:tr h="288036">
+              <a:tr h="265176">
                 <a:tc>
                   <a:txBody>
                     <a:bodyPr wrap="square"/>
@@ -26993,7 +27064,7 @@
                   </a:tcPr>
                 </a:tc>
               </a:tr>
-              <a:tr h="288036">
+              <a:tr h="265176">
                 <a:tc>
                   <a:txBody>
                     <a:bodyPr wrap="square"/>
@@ -27260,7 +27331,7 @@
         </p:nvSpPr>
         <p:spPr>
           <a:xfrm>
-            <a:off x="502920" y="5440680"/>
+            <a:off x="502920" y="5047488"/>
             <a:ext cx="6766560" cy="365760"/>
           </a:xfrm>
           <a:prstGeom prst="rect">
@@ -27340,7 +27411,7 @@
         </p:nvSpPr>
         <p:spPr>
           <a:xfrm>
-            <a:off x="7498079" y="5440680"/>
+            <a:off x="7498079" y="5047488"/>
             <a:ext cx="4206240" cy="365760"/>
           </a:xfrm>
           <a:prstGeom prst="rect">
@@ -27363,13 +27434,13 @@
               </a:spcAft>
             </a:pPr>
             <a:r>
-              <a:rPr sz="1000" b="1">
+              <a:rPr sz="960" b="1">
                 <a:solidFill>
                   <a:srgbClr val="17508C"/>
                 </a:solidFill>
                 <a:latin typeface="Malgun Gothic"/>
               </a:rPr>
-              <a:t>지표</a:t>
+              <a:t>지표 (순위 + 값-수준)</a:t>
             </a:r>
           </a:p>
           <a:p>
@@ -27382,13 +27453,13 @@
               </a:spcAft>
             </a:pPr>
             <a:r>
-              <a:rPr sz="1000" b="0">
+              <a:rPr sz="960" b="0">
                 <a:solidFill>
                   <a:srgbClr val="1A1A1A"/>
                 </a:solidFill>
                 <a:latin typeface="Malgun Gothic"/>
               </a:rPr>
-              <a:t>Spearman ρ ↑ (오라클 φ 대비 순위). 평균=데이터셋 단순평균.</a:t>
+              <a:t>표 = Spearman ρ ↑ (순위). 평균=데이터셋 단순평균.</a:t>
             </a:r>
           </a:p>
           <a:p>
@@ -27401,13 +27472,13 @@
               </a:spcAft>
             </a:pPr>
             <a:r>
-              <a:rPr sz="1000" b="0">
+              <a:rPr sz="960" b="0">
                 <a:solidFill>
                   <a:srgbClr val="1A1A1A"/>
                 </a:solidFill>
                 <a:latin typeface="Malgun Gothic"/>
               </a:rPr>
-              <a:t>Flirds·Banzhaf 순위 최상; MC기반 GTG/FedSV/ShapleyFL·ComFedSV·Ripple은 noisy.</a:t>
+              <a:t>순위 최상: Flirds·Banzhaf; MC기반 GTG/FedSV/ShapleyFL·ComFedSV·Ripple은 noisy.</a:t>
             </a:r>
           </a:p>
           <a:p>
@@ -27420,13 +27491,32 @@
               </a:spcAft>
             </a:pPr>
             <a:r>
-              <a:rPr sz="1000" b="0">
+              <a:rPr sz="960" b="1">
+                <a:solidFill>
+                  <a:srgbClr val="17508C"/>
+                </a:solidFill>
+                <a:latin typeface="Malgun Gothic"/>
+              </a:rPr>
+              <a:t>값-수준 Pearson(전 셀): Flirds 0.93·Banzhaf 1.00·loss-heur 0.88 ≫ GTG 0.61·FedSV 0.41</a:t>
+            </a:r>
+          </a:p>
+          <a:p>
+            <a:pPr algn="l">
+              <a:spcBef>
+                <a:spcPts val="0"/>
+              </a:spcBef>
+              <a:spcAft>
+                <a:spcPts val="300"/>
+              </a:spcAft>
+            </a:pPr>
+            <a:r>
+              <a:rPr sz="960" b="0">
                 <a:solidFill>
                   <a:srgbClr val="1A1A1A"/>
                 </a:solidFill>
                 <a:latin typeface="Malgun Gothic"/>
               </a:rPr>
-              <a:t>2차항 고유 기여는 순위 아닌 값-거리(retrain 페이지 하단).</a:t>
+              <a:t>→ 순위 포화해도 값-수준은 Flirds·Banzhaf만 높음 (2차 효과는 값-거리, retrain 페이지).</a:t>
             </a:r>
           </a:p>
         </p:txBody>
@@ -27461,7 +27551,7 @@
                 </a:solidFill>
                 <a:latin typeface="Malgun Gothic"/>
               </a:rPr>
-              <a:t>iid·feature_noise는 in-run oracle 신호 약함(클라 동질). 비교 방법 10종 전체(로스터 11종 = 10종 + in-run oracle 기준=1.0). 출처: runs/track_c/c1/* 재집계.</a:t>
+              <a:t>iid·feature_noise는 in-run oracle 신호 약함(클라 동질). 비교 방법 10종 전체(로스터 11종 = 10종 + in-run oracle 기준=1.0). Pearson=값-수준 선형상관(fidelity.csv 파생). 출처: runs/track_c/c1/* + fidelity.csv.</a:t>
             </a:r>
           </a:p>
         </p:txBody>
@@ -27615,7 +27705,7 @@
         </p:nvGraphicFramePr>
         <p:xfrm>
           <a:off x="502920" y="1371600"/>
-          <a:ext cx="11183109" cy="3744468"/>
+          <a:ext cx="11183109" cy="3447288"/>
         </p:xfrm>
         <a:graphic>
           <a:graphicData uri="http://schemas.openxmlformats.org/drawingml/2006/table">
@@ -27636,7 +27726,7 @@
                 <a:gridCol w="951754"/>
                 <a:gridCol w="951754"/>
               </a:tblGrid>
-              <a:tr h="288036">
+              <a:tr h="265176">
                 <a:tc>
                   <a:txBody>
                     <a:bodyPr wrap="square"/>
@@ -27891,7 +27981,7 @@
                   </a:tcPr>
                 </a:tc>
               </a:tr>
-              <a:tr h="288036">
+              <a:tr h="265176">
                 <a:tc>
                   <a:txBody>
                     <a:bodyPr wrap="square"/>
@@ -28146,7 +28236,7 @@
                   </a:tcPr>
                 </a:tc>
               </a:tr>
-              <a:tr h="288036">
+              <a:tr h="265176">
                 <a:tc>
                   <a:txBody>
                     <a:bodyPr wrap="square"/>
@@ -28401,7 +28491,7 @@
                   </a:tcPr>
                 </a:tc>
               </a:tr>
-              <a:tr h="288036">
+              <a:tr h="265176">
                 <a:tc>
                   <a:txBody>
                     <a:bodyPr wrap="square"/>
@@ -28656,7 +28746,7 @@
                   </a:tcPr>
                 </a:tc>
               </a:tr>
-              <a:tr h="288036">
+              <a:tr h="265176">
                 <a:tc>
                   <a:txBody>
                     <a:bodyPr wrap="square"/>
@@ -28911,7 +29001,7 @@
                   </a:tcPr>
                 </a:tc>
               </a:tr>
-              <a:tr h="288036">
+              <a:tr h="265176">
                 <a:tc>
                   <a:txBody>
                     <a:bodyPr wrap="square"/>
@@ -29166,7 +29256,7 @@
                   </a:tcPr>
                 </a:tc>
               </a:tr>
-              <a:tr h="288036">
+              <a:tr h="265176">
                 <a:tc>
                   <a:txBody>
                     <a:bodyPr wrap="square"/>
@@ -29421,7 +29511,7 @@
                   </a:tcPr>
                 </a:tc>
               </a:tr>
-              <a:tr h="288036">
+              <a:tr h="265176">
                 <a:tc>
                   <a:txBody>
                     <a:bodyPr wrap="square"/>
@@ -29676,7 +29766,7 @@
                   </a:tcPr>
                 </a:tc>
               </a:tr>
-              <a:tr h="288036">
+              <a:tr h="265176">
                 <a:tc>
                   <a:txBody>
                     <a:bodyPr wrap="square"/>
@@ -29931,7 +30021,7 @@
                   </a:tcPr>
                 </a:tc>
               </a:tr>
-              <a:tr h="288036">
+              <a:tr h="265176">
                 <a:tc>
                   <a:txBody>
                     <a:bodyPr wrap="square"/>
@@ -30186,7 +30276,7 @@
                   </a:tcPr>
                 </a:tc>
               </a:tr>
-              <a:tr h="288036">
+              <a:tr h="265176">
                 <a:tc>
                   <a:txBody>
                     <a:bodyPr wrap="square"/>
@@ -30441,7 +30531,7 @@
                   </a:tcPr>
                 </a:tc>
               </a:tr>
-              <a:tr h="288036">
+              <a:tr h="265176">
                 <a:tc>
                   <a:txBody>
                     <a:bodyPr wrap="square"/>
@@ -30696,7 +30786,7 @@
                   </a:tcPr>
                 </a:tc>
               </a:tr>
-              <a:tr h="288036">
+              <a:tr h="265176">
                 <a:tc>
                   <a:txBody>
                     <a:bodyPr wrap="square"/>
@@ -30963,7 +31053,7 @@
         </p:nvSpPr>
         <p:spPr>
           <a:xfrm>
-            <a:off x="502920" y="5440680"/>
+            <a:off x="502920" y="5047488"/>
             <a:ext cx="6766560" cy="365760"/>
           </a:xfrm>
           <a:prstGeom prst="rect">
@@ -31062,7 +31152,7 @@
         </p:nvSpPr>
         <p:spPr>
           <a:xfrm>
-            <a:off x="7498079" y="5440680"/>
+            <a:off x="7498079" y="5047488"/>
             <a:ext cx="4206240" cy="365760"/>
           </a:xfrm>
           <a:prstGeom prst="rect">
@@ -31085,13 +31175,13 @@
               </a:spcAft>
             </a:pPr>
             <a:r>
-              <a:rPr sz="1000" b="1">
+              <a:rPr sz="960" b="1">
                 <a:solidFill>
                   <a:srgbClr val="17508C"/>
                 </a:solidFill>
                 <a:latin typeface="Malgun Gothic"/>
               </a:rPr>
-              <a:t>지표 / 2차항 효과</a:t>
+              <a:t>지표 / 값-수준 / 2차항</a:t>
             </a:r>
           </a:p>
           <a:p>
@@ -31104,13 +31194,13 @@
               </a:spcAft>
             </a:pPr>
             <a:r>
-              <a:rPr sz="1000" b="0">
+              <a:rPr sz="960" b="0">
                 <a:solidFill>
                   <a:srgbClr val="1A1A1A"/>
                 </a:solidFill>
                 <a:latin typeface="Malgun Gothic"/>
               </a:rPr>
-              <a:t>Spearman ρ ↑ (retrain oracle φ 대비). 평균=데이터셋 단순.</a:t>
+              <a:t>표 = Spearman ρ ↑ (retrain oracle φ 대비). 평균=데이터셋 단순.</a:t>
             </a:r>
           </a:p>
           <a:p>
@@ -31123,13 +31213,13 @@
               </a:spcAft>
             </a:pPr>
             <a:r>
-              <a:rPr sz="1000" b="0">
+              <a:rPr sz="960" b="1">
                 <a:solidFill>
-                  <a:srgbClr val="1A1A1A"/>
+                  <a:srgbClr val="17508C"/>
                 </a:solidFill>
                 <a:latin typeface="Malgun Gothic"/>
               </a:rPr>
-              <a:t>2차항: euclid_d(값-거리) label_flip CIFAR 0.031 vs 1차 0.046</a:t>
+              <a:t>값-수준 Pearson(전 셀)도 전부 낮음: Flirds 0.35·loss-heur 0.42·ShapleyFL 0.44 — 재학습 게임 괴리는 값-수준서도 확인.</a:t>
             </a:r>
           </a:p>
           <a:p>
@@ -31142,13 +31232,13 @@
               </a:spcAft>
             </a:pPr>
             <a:r>
-              <a:rPr sz="1000" b="0">
+              <a:rPr sz="960" b="0">
                 <a:solidFill>
                   <a:srgbClr val="1A1A1A"/>
                 </a:solidFill>
                 <a:latin typeface="Malgun Gothic"/>
               </a:rPr>
-              <a:t>(MNIST 0.207 vs 0.370) → 값 오차 1차 대비 ~25–50%↓.</a:t>
+              <a:t>2차항: euclid_d(값-거리) label_flip CIFAR 0.031 vs 1차 0.046 (MNIST 0.207 vs 0.370).</a:t>
             </a:r>
           </a:p>
         </p:txBody>
@@ -31183,7 +31273,7 @@
                 </a:solidFill>
                 <a:latin typeface="Malgun Gothic"/>
               </a:rPr>
-              <a:t>표=Spearman ρ ↑ (rho_a_mean, 3-seed). LLM reference(N=5)는 retrain oracle와 1.000 일치 → 괴리는 이질성 구동(이어지는 LLM standard·reference 페이지). 출처: RESULTS.txt.</a:t>
+              <a:t>표=Spearman ρ ↑ (rho_a_mean, 3-seed). Pearson_a=값-수준(fidelity.csv). LLM reference(N=5)는 retrain oracle와 1.000 일치 → 괴리는 이질성 구동(이어지는 페이지). 출처: RESULTS.txt + fidelity.csv.</a:t>
             </a:r>
           </a:p>
         </p:txBody>
@@ -31336,7 +31426,7 @@
         <p:spPr>
           <a:xfrm>
             <a:off x="502920" y="1417320"/>
-            <a:ext cx="5486400" cy="274320"/>
+            <a:ext cx="5532120" cy="274320"/>
           </a:xfrm>
           <a:prstGeom prst="rect">
             <a:avLst/>
@@ -31372,7 +31462,7 @@
         </p:nvGraphicFramePr>
         <p:xfrm>
           <a:off x="502920" y="1709928"/>
-          <a:ext cx="5486396" cy="2962656"/>
+          <a:ext cx="5532118" cy="2962656"/>
         </p:xfrm>
         <a:graphic>
           <a:graphicData uri="http://schemas.openxmlformats.org/drawingml/2006/table">
@@ -31381,12 +31471,13 @@
                 <a:tableStyleId>{5940675A-B579-460E-94D1-54222C63F5DA}</a:tableStyleId>
               </a:tblPr>
               <a:tblGrid>
-                <a:gridCol w="1155031"/>
-                <a:gridCol w="907524"/>
-                <a:gridCol w="825022"/>
-                <a:gridCol w="866273"/>
-                <a:gridCol w="866273"/>
-                <a:gridCol w="866273"/>
+                <a:gridCol w="1027511"/>
+                <a:gridCol w="756248"/>
+                <a:gridCol w="723367"/>
+                <a:gridCol w="756248"/>
+                <a:gridCol w="756248"/>
+                <a:gridCol w="756248"/>
+                <a:gridCol w="756248"/>
               </a:tblGrid>
               <a:tr h="329184">
                 <a:tc>
@@ -31396,7 +31487,7 @@
                     <a:p>
                       <a:pPr algn="l"/>
                       <a:r>
-                        <a:rPr sz="919" b="1">
+                        <a:rPr sz="840" b="1">
                           <a:solidFill>
                             <a:srgbClr val="17508C"/>
                           </a:solidFill>
@@ -31419,7 +31510,7 @@
                     <a:p>
                       <a:pPr algn="ctr"/>
                       <a:r>
-                        <a:rPr sz="919" b="1">
+                        <a:rPr sz="840" b="1">
                           <a:solidFill>
                             <a:srgbClr val="17508C"/>
                           </a:solidFill>
@@ -31442,7 +31533,7 @@
                     <a:p>
                       <a:pPr algn="ctr"/>
                       <a:r>
-                        <a:rPr sz="919" b="1">
+                        <a:rPr sz="840" b="1">
                           <a:solidFill>
                             <a:srgbClr val="17508C"/>
                           </a:solidFill>
@@ -31465,12 +31556,35 @@
                     <a:p>
                       <a:pPr algn="ctr"/>
                       <a:r>
-                        <a:rPr sz="919" b="1">
+                        <a:rPr sz="840" b="1">
                           <a:solidFill>
                             <a:srgbClr val="17508C"/>
                           </a:solidFill>
                           <a:latin typeface="Malgun Gothic"/>
                         </a:rPr>
+                        <a:t>Pearson ↑</a:t>
+                      </a:r>
+                    </a:p>
+                  </a:txBody>
+                  <a:tcPr marL="50800" marR="50800" marT="19050" marB="19050" anchor="ctr">
+                    <a:solidFill>
+                      <a:srgbClr val="EFEFEF"/>
+                    </a:solidFill>
+                  </a:tcPr>
+                </a:tc>
+                <a:tc>
+                  <a:txBody>
+                    <a:bodyPr wrap="square"/>
+                    <a:lstStyle/>
+                    <a:p>
+                      <a:pPr algn="ctr"/>
+                      <a:r>
+                        <a:rPr sz="840" b="1">
+                          <a:solidFill>
+                            <a:srgbClr val="17508C"/>
+                          </a:solidFill>
+                          <a:latin typeface="Malgun Gothic"/>
+                        </a:rPr>
                         <a:t>cosine_d ↓</a:t>
                       </a:r>
                     </a:p>
@@ -31488,7 +31602,7 @@
                     <a:p>
                       <a:pPr algn="ctr"/>
                       <a:r>
-                        <a:rPr sz="919" b="1">
+                        <a:rPr sz="840" b="1">
                           <a:solidFill>
                             <a:srgbClr val="17508C"/>
                           </a:solidFill>
@@ -31511,7 +31625,7 @@
                     <a:p>
                       <a:pPr algn="ctr"/>
                       <a:r>
-                        <a:rPr sz="919" b="1">
+                        <a:rPr sz="840" b="1">
                           <a:solidFill>
                             <a:srgbClr val="17508C"/>
                           </a:solidFill>
@@ -31536,7 +31650,7 @@
                     <a:p>
                       <a:pPr algn="l"/>
                       <a:r>
-                        <a:rPr sz="919" b="0">
+                        <a:rPr sz="840" b="0">
                           <a:solidFill>
                             <a:srgbClr val="1A1A1A"/>
                           </a:solidFill>
@@ -31559,7 +31673,7 @@
                     <a:p>
                       <a:pPr algn="ctr"/>
                       <a:r>
-                        <a:rPr sz="919" b="0">
+                        <a:rPr sz="840" b="0">
                           <a:solidFill>
                             <a:srgbClr val="1A1A1A"/>
                           </a:solidFill>
@@ -31582,7 +31696,7 @@
                     <a:p>
                       <a:pPr algn="ctr"/>
                       <a:r>
-                        <a:rPr sz="919" b="0">
+                        <a:rPr sz="840" b="0">
                           <a:solidFill>
                             <a:srgbClr val="1A1A1A"/>
                           </a:solidFill>
@@ -31605,7 +31719,30 @@
                     <a:p>
                       <a:pPr algn="ctr"/>
                       <a:r>
-                        <a:rPr sz="919" b="0">
+                        <a:rPr sz="840" b="0">
+                          <a:solidFill>
+                            <a:srgbClr val="1A1A1A"/>
+                          </a:solidFill>
+                          <a:latin typeface="Malgun Gothic"/>
+                        </a:rPr>
+                        <a:t>1.000</a:t>
+                      </a:r>
+                    </a:p>
+                  </a:txBody>
+                  <a:tcPr marL="50800" marR="50800" marT="19050" marB="19050" anchor="ctr">
+                    <a:solidFill>
+                      <a:srgbClr val="FFFFFF"/>
+                    </a:solidFill>
+                  </a:tcPr>
+                </a:tc>
+                <a:tc>
+                  <a:txBody>
+                    <a:bodyPr wrap="square"/>
+                    <a:lstStyle/>
+                    <a:p>
+                      <a:pPr algn="ctr"/>
+                      <a:r>
+                        <a:rPr sz="840" b="0">
                           <a:solidFill>
                             <a:srgbClr val="1A1A1A"/>
                           </a:solidFill>
@@ -31628,7 +31765,7 @@
                     <a:p>
                       <a:pPr algn="ctr"/>
                       <a:r>
-                        <a:rPr sz="919" b="0">
+                        <a:rPr sz="840" b="0">
                           <a:solidFill>
                             <a:srgbClr val="1A1A1A"/>
                           </a:solidFill>
@@ -31651,7 +31788,7 @@
                     <a:p>
                       <a:pPr algn="ctr"/>
                       <a:r>
-                        <a:rPr sz="919" b="0">
+                        <a:rPr sz="840" b="0">
                           <a:solidFill>
                             <a:srgbClr val="1A1A1A"/>
                           </a:solidFill>
@@ -31676,7 +31813,7 @@
                     <a:p>
                       <a:pPr algn="l"/>
                       <a:r>
-                        <a:rPr sz="919" b="0">
+                        <a:rPr sz="840" b="0">
                           <a:solidFill>
                             <a:srgbClr val="1A1A1A"/>
                           </a:solidFill>
@@ -31699,7 +31836,7 @@
                     <a:p>
                       <a:pPr algn="ctr"/>
                       <a:r>
-                        <a:rPr sz="919" b="0">
+                        <a:rPr sz="840" b="0">
                           <a:solidFill>
                             <a:srgbClr val="1A1A1A"/>
                           </a:solidFill>
@@ -31722,7 +31859,7 @@
                     <a:p>
                       <a:pPr algn="ctr"/>
                       <a:r>
-                        <a:rPr sz="919" b="0">
+                        <a:rPr sz="840" b="0">
                           <a:solidFill>
                             <a:srgbClr val="1A1A1A"/>
                           </a:solidFill>
@@ -31745,7 +31882,30 @@
                     <a:p>
                       <a:pPr algn="ctr"/>
                       <a:r>
-                        <a:rPr sz="919" b="0">
+                        <a:rPr sz="840" b="0">
+                          <a:solidFill>
+                            <a:srgbClr val="1A1A1A"/>
+                          </a:solidFill>
+                          <a:latin typeface="Malgun Gothic"/>
+                        </a:rPr>
+                        <a:t>1.000</a:t>
+                      </a:r>
+                    </a:p>
+                  </a:txBody>
+                  <a:tcPr marL="50800" marR="50800" marT="19050" marB="19050" anchor="ctr">
+                    <a:solidFill>
+                      <a:srgbClr val="F8F8F8"/>
+                    </a:solidFill>
+                  </a:tcPr>
+                </a:tc>
+                <a:tc>
+                  <a:txBody>
+                    <a:bodyPr wrap="square"/>
+                    <a:lstStyle/>
+                    <a:p>
+                      <a:pPr algn="ctr"/>
+                      <a:r>
+                        <a:rPr sz="840" b="0">
                           <a:solidFill>
                             <a:srgbClr val="1A1A1A"/>
                           </a:solidFill>
@@ -31768,7 +31928,7 @@
                     <a:p>
                       <a:pPr algn="ctr"/>
                       <a:r>
-                        <a:rPr sz="919" b="0">
+                        <a:rPr sz="840" b="0">
                           <a:solidFill>
                             <a:srgbClr val="1A1A1A"/>
                           </a:solidFill>
@@ -31791,7 +31951,7 @@
                     <a:p>
                       <a:pPr algn="ctr"/>
                       <a:r>
-                        <a:rPr sz="919" b="0">
+                        <a:rPr sz="840" b="0">
                           <a:solidFill>
                             <a:srgbClr val="1A1A1A"/>
                           </a:solidFill>
@@ -31816,7 +31976,7 @@
                     <a:p>
                       <a:pPr algn="l"/>
                       <a:r>
-                        <a:rPr sz="919" b="0">
+                        <a:rPr sz="840" b="0">
                           <a:solidFill>
                             <a:srgbClr val="1A1A1A"/>
                           </a:solidFill>
@@ -31839,7 +31999,7 @@
                     <a:p>
                       <a:pPr algn="ctr"/>
                       <a:r>
-                        <a:rPr sz="919" b="0">
+                        <a:rPr sz="840" b="0">
                           <a:solidFill>
                             <a:srgbClr val="1A1A1A"/>
                           </a:solidFill>
@@ -31862,7 +32022,7 @@
                     <a:p>
                       <a:pPr algn="ctr"/>
                       <a:r>
-                        <a:rPr sz="919" b="0">
+                        <a:rPr sz="840" b="0">
                           <a:solidFill>
                             <a:srgbClr val="1A1A1A"/>
                           </a:solidFill>
@@ -31885,7 +32045,30 @@
                     <a:p>
                       <a:pPr algn="ctr"/>
                       <a:r>
-                        <a:rPr sz="919" b="0">
+                        <a:rPr sz="840" b="0">
+                          <a:solidFill>
+                            <a:srgbClr val="1A1A1A"/>
+                          </a:solidFill>
+                          <a:latin typeface="Malgun Gothic"/>
+                        </a:rPr>
+                        <a:t>1.000</a:t>
+                      </a:r>
+                    </a:p>
+                  </a:txBody>
+                  <a:tcPr marL="50800" marR="50800" marT="19050" marB="19050" anchor="ctr">
+                    <a:solidFill>
+                      <a:srgbClr val="FFFFFF"/>
+                    </a:solidFill>
+                  </a:tcPr>
+                </a:tc>
+                <a:tc>
+                  <a:txBody>
+                    <a:bodyPr wrap="square"/>
+                    <a:lstStyle/>
+                    <a:p>
+                      <a:pPr algn="ctr"/>
+                      <a:r>
+                        <a:rPr sz="840" b="0">
                           <a:solidFill>
                             <a:srgbClr val="1A1A1A"/>
                           </a:solidFill>
@@ -31908,7 +32091,7 @@
                     <a:p>
                       <a:pPr algn="ctr"/>
                       <a:r>
-                        <a:rPr sz="919" b="0">
+                        <a:rPr sz="840" b="0">
                           <a:solidFill>
                             <a:srgbClr val="1A1A1A"/>
                           </a:solidFill>
@@ -31931,7 +32114,7 @@
                     <a:p>
                       <a:pPr algn="ctr"/>
                       <a:r>
-                        <a:rPr sz="919" b="0">
+                        <a:rPr sz="840" b="0">
                           <a:solidFill>
                             <a:srgbClr val="1A1A1A"/>
                           </a:solidFill>
@@ -31956,7 +32139,7 @@
                     <a:p>
                       <a:pPr algn="l"/>
                       <a:r>
-                        <a:rPr sz="919" b="0">
+                        <a:rPr sz="840" b="0">
                           <a:solidFill>
                             <a:srgbClr val="1A1A1A"/>
                           </a:solidFill>
@@ -31979,7 +32162,7 @@
                     <a:p>
                       <a:pPr algn="ctr"/>
                       <a:r>
-                        <a:rPr sz="919" b="0">
+                        <a:rPr sz="840" b="0">
                           <a:solidFill>
                             <a:srgbClr val="1A1A1A"/>
                           </a:solidFill>
@@ -32002,7 +32185,7 @@
                     <a:p>
                       <a:pPr algn="ctr"/>
                       <a:r>
-                        <a:rPr sz="919" b="0">
+                        <a:rPr sz="840" b="0">
                           <a:solidFill>
                             <a:srgbClr val="1A1A1A"/>
                           </a:solidFill>
@@ -32025,7 +32208,30 @@
                     <a:p>
                       <a:pPr algn="ctr"/>
                       <a:r>
-                        <a:rPr sz="919" b="0">
+                        <a:rPr sz="840" b="0">
+                          <a:solidFill>
+                            <a:srgbClr val="1A1A1A"/>
+                          </a:solidFill>
+                          <a:latin typeface="Malgun Gothic"/>
+                        </a:rPr>
+                        <a:t>0.995</a:t>
+                      </a:r>
+                    </a:p>
+                  </a:txBody>
+                  <a:tcPr marL="50800" marR="50800" marT="19050" marB="19050" anchor="ctr">
+                    <a:solidFill>
+                      <a:srgbClr val="F8F8F8"/>
+                    </a:solidFill>
+                  </a:tcPr>
+                </a:tc>
+                <a:tc>
+                  <a:txBody>
+                    <a:bodyPr wrap="square"/>
+                    <a:lstStyle/>
+                    <a:p>
+                      <a:pPr algn="ctr"/>
+                      <a:r>
+                        <a:rPr sz="840" b="0">
                           <a:solidFill>
                             <a:srgbClr val="1A1A1A"/>
                           </a:solidFill>
@@ -32048,7 +32254,7 @@
                     <a:p>
                       <a:pPr algn="ctr"/>
                       <a:r>
-                        <a:rPr sz="919" b="0">
+                        <a:rPr sz="840" b="0">
                           <a:solidFill>
                             <a:srgbClr val="1A1A1A"/>
                           </a:solidFill>
@@ -32071,7 +32277,7 @@
                     <a:p>
                       <a:pPr algn="ctr"/>
                       <a:r>
-                        <a:rPr sz="919" b="0">
+                        <a:rPr sz="840" b="0">
                           <a:solidFill>
                             <a:srgbClr val="1A1A1A"/>
                           </a:solidFill>
@@ -32096,7 +32302,7 @@
                     <a:p>
                       <a:pPr algn="l"/>
                       <a:r>
-                        <a:rPr sz="919" b="0">
+                        <a:rPr sz="840" b="0">
                           <a:solidFill>
                             <a:srgbClr val="1A1A1A"/>
                           </a:solidFill>
@@ -32119,7 +32325,7 @@
                     <a:p>
                       <a:pPr algn="ctr"/>
                       <a:r>
-                        <a:rPr sz="919" b="0">
+                        <a:rPr sz="840" b="0">
                           <a:solidFill>
                             <a:srgbClr val="1A1A1A"/>
                           </a:solidFill>
@@ -32142,7 +32348,7 @@
                     <a:p>
                       <a:pPr algn="ctr"/>
                       <a:r>
-                        <a:rPr sz="919" b="0">
+                        <a:rPr sz="840" b="0">
                           <a:solidFill>
                             <a:srgbClr val="1A1A1A"/>
                           </a:solidFill>
@@ -32165,7 +32371,30 @@
                     <a:p>
                       <a:pPr algn="ctr"/>
                       <a:r>
-                        <a:rPr sz="919" b="0">
+                        <a:rPr sz="840" b="0">
+                          <a:solidFill>
+                            <a:srgbClr val="1A1A1A"/>
+                          </a:solidFill>
+                          <a:latin typeface="Malgun Gothic"/>
+                        </a:rPr>
+                        <a:t>0.959</a:t>
+                      </a:r>
+                    </a:p>
+                  </a:txBody>
+                  <a:tcPr marL="50800" marR="50800" marT="19050" marB="19050" anchor="ctr">
+                    <a:solidFill>
+                      <a:srgbClr val="FFFFFF"/>
+                    </a:solidFill>
+                  </a:tcPr>
+                </a:tc>
+                <a:tc>
+                  <a:txBody>
+                    <a:bodyPr wrap="square"/>
+                    <a:lstStyle/>
+                    <a:p>
+                      <a:pPr algn="ctr"/>
+                      <a:r>
+                        <a:rPr sz="840" b="0">
                           <a:solidFill>
                             <a:srgbClr val="1A1A1A"/>
                           </a:solidFill>
@@ -32188,7 +32417,7 @@
                     <a:p>
                       <a:pPr algn="ctr"/>
                       <a:r>
-                        <a:rPr sz="919" b="0">
+                        <a:rPr sz="840" b="0">
                           <a:solidFill>
                             <a:srgbClr val="1A1A1A"/>
                           </a:solidFill>
@@ -32211,7 +32440,7 @@
                     <a:p>
                       <a:pPr algn="ctr"/>
                       <a:r>
-                        <a:rPr sz="919" b="0">
+                        <a:rPr sz="840" b="0">
                           <a:solidFill>
                             <a:srgbClr val="1A1A1A"/>
                           </a:solidFill>
@@ -32236,7 +32465,7 @@
                     <a:p>
                       <a:pPr algn="l"/>
                       <a:r>
-                        <a:rPr sz="919" b="0">
+                        <a:rPr sz="840" b="0">
                           <a:solidFill>
                             <a:srgbClr val="1A1A1A"/>
                           </a:solidFill>
@@ -32259,7 +32488,7 @@
                     <a:p>
                       <a:pPr algn="ctr"/>
                       <a:r>
-                        <a:rPr sz="919" b="0">
+                        <a:rPr sz="840" b="0">
                           <a:solidFill>
                             <a:srgbClr val="1A1A1A"/>
                           </a:solidFill>
@@ -32282,7 +32511,7 @@
                     <a:p>
                       <a:pPr algn="ctr"/>
                       <a:r>
-                        <a:rPr sz="919" b="0">
+                        <a:rPr sz="840" b="0">
                           <a:solidFill>
                             <a:srgbClr val="1A1A1A"/>
                           </a:solidFill>
@@ -32305,7 +32534,30 @@
                     <a:p>
                       <a:pPr algn="ctr"/>
                       <a:r>
-                        <a:rPr sz="919" b="0">
+                        <a:rPr sz="840" b="0">
+                          <a:solidFill>
+                            <a:srgbClr val="1A1A1A"/>
+                          </a:solidFill>
+                          <a:latin typeface="Malgun Gothic"/>
+                        </a:rPr>
+                        <a:t>0.095</a:t>
+                      </a:r>
+                    </a:p>
+                  </a:txBody>
+                  <a:tcPr marL="50800" marR="50800" marT="19050" marB="19050" anchor="ctr">
+                    <a:solidFill>
+                      <a:srgbClr val="F8F8F8"/>
+                    </a:solidFill>
+                  </a:tcPr>
+                </a:tc>
+                <a:tc>
+                  <a:txBody>
+                    <a:bodyPr wrap="square"/>
+                    <a:lstStyle/>
+                    <a:p>
+                      <a:pPr algn="ctr"/>
+                      <a:r>
+                        <a:rPr sz="840" b="0">
                           <a:solidFill>
                             <a:srgbClr val="1A1A1A"/>
                           </a:solidFill>
@@ -32328,7 +32580,7 @@
                     <a:p>
                       <a:pPr algn="ctr"/>
                       <a:r>
-                        <a:rPr sz="919" b="0">
+                        <a:rPr sz="840" b="0">
                           <a:solidFill>
                             <a:srgbClr val="1A1A1A"/>
                           </a:solidFill>
@@ -32351,7 +32603,7 @@
                     <a:p>
                       <a:pPr algn="ctr"/>
                       <a:r>
-                        <a:rPr sz="919" b="0">
+                        <a:rPr sz="840" b="0">
                           <a:solidFill>
                             <a:srgbClr val="1A1A1A"/>
                           </a:solidFill>
@@ -32376,7 +32628,7 @@
                     <a:p>
                       <a:pPr algn="l"/>
                       <a:r>
-                        <a:rPr sz="919" b="0">
+                        <a:rPr sz="840" b="0">
                           <a:solidFill>
                             <a:srgbClr val="1A1A1A"/>
                           </a:solidFill>
@@ -32399,7 +32651,7 @@
                     <a:p>
                       <a:pPr algn="ctr"/>
                       <a:r>
-                        <a:rPr sz="919" b="0">
+                        <a:rPr sz="840" b="0">
                           <a:solidFill>
                             <a:srgbClr val="1A1A1A"/>
                           </a:solidFill>
@@ -32422,7 +32674,7 @@
                     <a:p>
                       <a:pPr algn="ctr"/>
                       <a:r>
-                        <a:rPr sz="919" b="0">
+                        <a:rPr sz="840" b="0">
                           <a:solidFill>
                             <a:srgbClr val="1A1A1A"/>
                           </a:solidFill>
@@ -32445,7 +32697,30 @@
                     <a:p>
                       <a:pPr algn="ctr"/>
                       <a:r>
-                        <a:rPr sz="919" b="0">
+                        <a:rPr sz="840" b="0">
+                          <a:solidFill>
+                            <a:srgbClr val="1A1A1A"/>
+                          </a:solidFill>
+                          <a:latin typeface="Malgun Gothic"/>
+                        </a:rPr>
+                        <a:t>0.245</a:t>
+                      </a:r>
+                    </a:p>
+                  </a:txBody>
+                  <a:tcPr marL="50800" marR="50800" marT="19050" marB="19050" anchor="ctr">
+                    <a:solidFill>
+                      <a:srgbClr val="FFFFFF"/>
+                    </a:solidFill>
+                  </a:tcPr>
+                </a:tc>
+                <a:tc>
+                  <a:txBody>
+                    <a:bodyPr wrap="square"/>
+                    <a:lstStyle/>
+                    <a:p>
+                      <a:pPr algn="ctr"/>
+                      <a:r>
+                        <a:rPr sz="840" b="0">
                           <a:solidFill>
                             <a:srgbClr val="1A1A1A"/>
                           </a:solidFill>
@@ -32468,7 +32743,7 @@
                     <a:p>
                       <a:pPr algn="ctr"/>
                       <a:r>
-                        <a:rPr sz="919" b="0">
+                        <a:rPr sz="840" b="0">
                           <a:solidFill>
                             <a:srgbClr val="1A1A1A"/>
                           </a:solidFill>
@@ -32491,7 +32766,7 @@
                     <a:p>
                       <a:pPr algn="ctr"/>
                       <a:r>
-                        <a:rPr sz="919" b="0">
+                        <a:rPr sz="840" b="0">
                           <a:solidFill>
                             <a:srgbClr val="1A1A1A"/>
                           </a:solidFill>
@@ -32516,7 +32791,7 @@
                     <a:p>
                       <a:pPr algn="l"/>
                       <a:r>
-                        <a:rPr sz="919" b="0">
+                        <a:rPr sz="840" b="0">
                           <a:solidFill>
                             <a:srgbClr val="1A1A1A"/>
                           </a:solidFill>
@@ -32539,7 +32814,7 @@
                     <a:p>
                       <a:pPr algn="ctr"/>
                       <a:r>
-                        <a:rPr sz="919" b="0">
+                        <a:rPr sz="840" b="0">
                           <a:solidFill>
                             <a:srgbClr val="1A1A1A"/>
                           </a:solidFill>
@@ -32562,7 +32837,7 @@
                     <a:p>
                       <a:pPr algn="ctr"/>
                       <a:r>
-                        <a:rPr sz="919" b="0">
+                        <a:rPr sz="840" b="0">
                           <a:solidFill>
                             <a:srgbClr val="1A1A1A"/>
                           </a:solidFill>
@@ -32585,7 +32860,30 @@
                     <a:p>
                       <a:pPr algn="ctr"/>
                       <a:r>
-                        <a:rPr sz="919" b="0">
+                        <a:rPr sz="840" b="0">
+                          <a:solidFill>
+                            <a:srgbClr val="1A1A1A"/>
+                          </a:solidFill>
+                          <a:latin typeface="Malgun Gothic"/>
+                        </a:rPr>
+                        <a:t>0.229</a:t>
+                      </a:r>
+                    </a:p>
+                  </a:txBody>
+                  <a:tcPr marL="50800" marR="50800" marT="19050" marB="19050" anchor="ctr">
+                    <a:solidFill>
+                      <a:srgbClr val="F8F8F8"/>
+                    </a:solidFill>
+                  </a:tcPr>
+                </a:tc>
+                <a:tc>
+                  <a:txBody>
+                    <a:bodyPr wrap="square"/>
+                    <a:lstStyle/>
+                    <a:p>
+                      <a:pPr algn="ctr"/>
+                      <a:r>
+                        <a:rPr sz="840" b="0">
                           <a:solidFill>
                             <a:srgbClr val="1A1A1A"/>
                           </a:solidFill>
@@ -32608,7 +32906,7 @@
                     <a:p>
                       <a:pPr algn="ctr"/>
                       <a:r>
-                        <a:rPr sz="919" b="0">
+                        <a:rPr sz="840" b="0">
                           <a:solidFill>
                             <a:srgbClr val="1A1A1A"/>
                           </a:solidFill>
@@ -32631,7 +32929,7 @@
                     <a:p>
                       <a:pPr algn="ctr"/>
                       <a:r>
-                        <a:rPr sz="919" b="0">
+                        <a:rPr sz="840" b="0">
                           <a:solidFill>
                             <a:srgbClr val="1A1A1A"/>
                           </a:solidFill>
@@ -32661,7 +32959,7 @@
         <p:spPr>
           <a:xfrm>
             <a:off x="6172200" y="1417320"/>
-            <a:ext cx="5029200" cy="274320"/>
+            <a:ext cx="5532120" cy="274320"/>
           </a:xfrm>
           <a:prstGeom prst="rect">
             <a:avLst/>
@@ -32697,7 +32995,7 @@
         </p:nvGraphicFramePr>
         <p:xfrm>
           <a:off x="6172200" y="1709928"/>
-          <a:ext cx="5029197" cy="2962656"/>
+          <a:ext cx="5532118" cy="2962656"/>
         </p:xfrm>
         <a:graphic>
           <a:graphicData uri="http://schemas.openxmlformats.org/drawingml/2006/table">
@@ -32706,12 +33004,13 @@
                 <a:tableStyleId>{5940675A-B579-460E-94D1-54222C63F5DA}</a:tableStyleId>
               </a:tblPr>
               <a:tblGrid>
-                <a:gridCol w="1058778"/>
-                <a:gridCol w="831897"/>
-                <a:gridCol w="756270"/>
-                <a:gridCol w="794084"/>
-                <a:gridCol w="794084"/>
-                <a:gridCol w="794084"/>
+                <a:gridCol w="1027511"/>
+                <a:gridCol w="756248"/>
+                <a:gridCol w="723367"/>
+                <a:gridCol w="756248"/>
+                <a:gridCol w="756248"/>
+                <a:gridCol w="756248"/>
+                <a:gridCol w="756248"/>
               </a:tblGrid>
               <a:tr h="329184">
                 <a:tc>
@@ -32721,7 +33020,7 @@
                     <a:p>
                       <a:pPr algn="l"/>
                       <a:r>
-                        <a:rPr sz="919" b="1">
+                        <a:rPr sz="840" b="1">
                           <a:solidFill>
                             <a:srgbClr val="17508C"/>
                           </a:solidFill>
@@ -32744,7 +33043,7 @@
                     <a:p>
                       <a:pPr algn="ctr"/>
                       <a:r>
-                        <a:rPr sz="919" b="1">
+                        <a:rPr sz="840" b="1">
                           <a:solidFill>
                             <a:srgbClr val="17508C"/>
                           </a:solidFill>
@@ -32767,7 +33066,7 @@
                     <a:p>
                       <a:pPr algn="ctr"/>
                       <a:r>
-                        <a:rPr sz="919" b="1">
+                        <a:rPr sz="840" b="1">
                           <a:solidFill>
                             <a:srgbClr val="17508C"/>
                           </a:solidFill>
@@ -32790,12 +33089,35 @@
                     <a:p>
                       <a:pPr algn="ctr"/>
                       <a:r>
-                        <a:rPr sz="919" b="1">
+                        <a:rPr sz="840" b="1">
                           <a:solidFill>
                             <a:srgbClr val="17508C"/>
                           </a:solidFill>
                           <a:latin typeface="Malgun Gothic"/>
                         </a:rPr>
+                        <a:t>Pearson ↑</a:t>
+                      </a:r>
+                    </a:p>
+                  </a:txBody>
+                  <a:tcPr marL="50800" marR="50800" marT="19050" marB="19050" anchor="ctr">
+                    <a:solidFill>
+                      <a:srgbClr val="EFEFEF"/>
+                    </a:solidFill>
+                  </a:tcPr>
+                </a:tc>
+                <a:tc>
+                  <a:txBody>
+                    <a:bodyPr wrap="square"/>
+                    <a:lstStyle/>
+                    <a:p>
+                      <a:pPr algn="ctr"/>
+                      <a:r>
+                        <a:rPr sz="840" b="1">
+                          <a:solidFill>
+                            <a:srgbClr val="17508C"/>
+                          </a:solidFill>
+                          <a:latin typeface="Malgun Gothic"/>
+                        </a:rPr>
                         <a:t>cosine_d ↓</a:t>
                       </a:r>
                     </a:p>
@@ -32813,7 +33135,7 @@
                     <a:p>
                       <a:pPr algn="ctr"/>
                       <a:r>
-                        <a:rPr sz="919" b="1">
+                        <a:rPr sz="840" b="1">
                           <a:solidFill>
                             <a:srgbClr val="17508C"/>
                           </a:solidFill>
@@ -32836,7 +33158,7 @@
                     <a:p>
                       <a:pPr algn="ctr"/>
                       <a:r>
-                        <a:rPr sz="919" b="1">
+                        <a:rPr sz="840" b="1">
                           <a:solidFill>
                             <a:srgbClr val="17508C"/>
                           </a:solidFill>
@@ -32861,7 +33183,7 @@
                     <a:p>
                       <a:pPr algn="l"/>
                       <a:r>
-                        <a:rPr sz="919" b="0">
+                        <a:rPr sz="840" b="0">
                           <a:solidFill>
                             <a:srgbClr val="1A1A1A"/>
                           </a:solidFill>
@@ -32884,7 +33206,7 @@
                     <a:p>
                       <a:pPr algn="ctr"/>
                       <a:r>
-                        <a:rPr sz="919" b="0">
+                        <a:rPr sz="840" b="0">
                           <a:solidFill>
                             <a:srgbClr val="1A1A1A"/>
                           </a:solidFill>
@@ -32907,7 +33229,7 @@
                     <a:p>
                       <a:pPr algn="ctr"/>
                       <a:r>
-                        <a:rPr sz="919" b="0">
+                        <a:rPr sz="840" b="0">
                           <a:solidFill>
                             <a:srgbClr val="1A1A1A"/>
                           </a:solidFill>
@@ -32930,7 +33252,30 @@
                     <a:p>
                       <a:pPr algn="ctr"/>
                       <a:r>
-                        <a:rPr sz="919" b="0">
+                        <a:rPr sz="840" b="0">
+                          <a:solidFill>
+                            <a:srgbClr val="1A1A1A"/>
+                          </a:solidFill>
+                          <a:latin typeface="Malgun Gothic"/>
+                        </a:rPr>
+                        <a:t>1.000</a:t>
+                      </a:r>
+                    </a:p>
+                  </a:txBody>
+                  <a:tcPr marL="50800" marR="50800" marT="19050" marB="19050" anchor="ctr">
+                    <a:solidFill>
+                      <a:srgbClr val="FFFFFF"/>
+                    </a:solidFill>
+                  </a:tcPr>
+                </a:tc>
+                <a:tc>
+                  <a:txBody>
+                    <a:bodyPr wrap="square"/>
+                    <a:lstStyle/>
+                    <a:p>
+                      <a:pPr algn="ctr"/>
+                      <a:r>
+                        <a:rPr sz="840" b="0">
                           <a:solidFill>
                             <a:srgbClr val="1A1A1A"/>
                           </a:solidFill>
@@ -32953,7 +33298,7 @@
                     <a:p>
                       <a:pPr algn="ctr"/>
                       <a:r>
-                        <a:rPr sz="919" b="0">
+                        <a:rPr sz="840" b="0">
                           <a:solidFill>
                             <a:srgbClr val="1A1A1A"/>
                           </a:solidFill>
@@ -32976,7 +33321,7 @@
                     <a:p>
                       <a:pPr algn="ctr"/>
                       <a:r>
-                        <a:rPr sz="919" b="0">
+                        <a:rPr sz="840" b="0">
                           <a:solidFill>
                             <a:srgbClr val="1A1A1A"/>
                           </a:solidFill>
@@ -33001,7 +33346,7 @@
                     <a:p>
                       <a:pPr algn="l"/>
                       <a:r>
-                        <a:rPr sz="919" b="0">
+                        <a:rPr sz="840" b="0">
                           <a:solidFill>
                             <a:srgbClr val="1A1A1A"/>
                           </a:solidFill>
@@ -33024,7 +33369,7 @@
                     <a:p>
                       <a:pPr algn="ctr"/>
                       <a:r>
-                        <a:rPr sz="919" b="0">
+                        <a:rPr sz="840" b="0">
                           <a:solidFill>
                             <a:srgbClr val="1A1A1A"/>
                           </a:solidFill>
@@ -33047,7 +33392,7 @@
                     <a:p>
                       <a:pPr algn="ctr"/>
                       <a:r>
-                        <a:rPr sz="919" b="0">
+                        <a:rPr sz="840" b="0">
                           <a:solidFill>
                             <a:srgbClr val="1A1A1A"/>
                           </a:solidFill>
@@ -33070,7 +33415,30 @@
                     <a:p>
                       <a:pPr algn="ctr"/>
                       <a:r>
-                        <a:rPr sz="919" b="0">
+                        <a:rPr sz="840" b="0">
+                          <a:solidFill>
+                            <a:srgbClr val="1A1A1A"/>
+                          </a:solidFill>
+                          <a:latin typeface="Malgun Gothic"/>
+                        </a:rPr>
+                        <a:t>1.000</a:t>
+                      </a:r>
+                    </a:p>
+                  </a:txBody>
+                  <a:tcPr marL="50800" marR="50800" marT="19050" marB="19050" anchor="ctr">
+                    <a:solidFill>
+                      <a:srgbClr val="F8F8F8"/>
+                    </a:solidFill>
+                  </a:tcPr>
+                </a:tc>
+                <a:tc>
+                  <a:txBody>
+                    <a:bodyPr wrap="square"/>
+                    <a:lstStyle/>
+                    <a:p>
+                      <a:pPr algn="ctr"/>
+                      <a:r>
+                        <a:rPr sz="840" b="0">
                           <a:solidFill>
                             <a:srgbClr val="1A1A1A"/>
                           </a:solidFill>
@@ -33093,7 +33461,7 @@
                     <a:p>
                       <a:pPr algn="ctr"/>
                       <a:r>
-                        <a:rPr sz="919" b="0">
+                        <a:rPr sz="840" b="0">
                           <a:solidFill>
                             <a:srgbClr val="1A1A1A"/>
                           </a:solidFill>
@@ -33116,7 +33484,7 @@
                     <a:p>
                       <a:pPr algn="ctr"/>
                       <a:r>
-                        <a:rPr sz="919" b="0">
+                        <a:rPr sz="840" b="0">
                           <a:solidFill>
                             <a:srgbClr val="1A1A1A"/>
                           </a:solidFill>
@@ -33141,7 +33509,7 @@
                     <a:p>
                       <a:pPr algn="l"/>
                       <a:r>
-                        <a:rPr sz="919" b="0">
+                        <a:rPr sz="840" b="0">
                           <a:solidFill>
                             <a:srgbClr val="1A1A1A"/>
                           </a:solidFill>
@@ -33164,7 +33532,7 @@
                     <a:p>
                       <a:pPr algn="ctr"/>
                       <a:r>
-                        <a:rPr sz="919" b="0">
+                        <a:rPr sz="840" b="0">
                           <a:solidFill>
                             <a:srgbClr val="1A1A1A"/>
                           </a:solidFill>
@@ -33187,7 +33555,7 @@
                     <a:p>
                       <a:pPr algn="ctr"/>
                       <a:r>
-                        <a:rPr sz="919" b="0">
+                        <a:rPr sz="840" b="0">
                           <a:solidFill>
                             <a:srgbClr val="1A1A1A"/>
                           </a:solidFill>
@@ -33210,7 +33578,30 @@
                     <a:p>
                       <a:pPr algn="ctr"/>
                       <a:r>
-                        <a:rPr sz="919" b="0">
+                        <a:rPr sz="840" b="0">
+                          <a:solidFill>
+                            <a:srgbClr val="1A1A1A"/>
+                          </a:solidFill>
+                          <a:latin typeface="Malgun Gothic"/>
+                        </a:rPr>
+                        <a:t>1.000</a:t>
+                      </a:r>
+                    </a:p>
+                  </a:txBody>
+                  <a:tcPr marL="50800" marR="50800" marT="19050" marB="19050" anchor="ctr">
+                    <a:solidFill>
+                      <a:srgbClr val="FFFFFF"/>
+                    </a:solidFill>
+                  </a:tcPr>
+                </a:tc>
+                <a:tc>
+                  <a:txBody>
+                    <a:bodyPr wrap="square"/>
+                    <a:lstStyle/>
+                    <a:p>
+                      <a:pPr algn="ctr"/>
+                      <a:r>
+                        <a:rPr sz="840" b="0">
                           <a:solidFill>
                             <a:srgbClr val="1A1A1A"/>
                           </a:solidFill>
@@ -33233,7 +33624,7 @@
                     <a:p>
                       <a:pPr algn="ctr"/>
                       <a:r>
-                        <a:rPr sz="919" b="0">
+                        <a:rPr sz="840" b="0">
                           <a:solidFill>
                             <a:srgbClr val="1A1A1A"/>
                           </a:solidFill>
@@ -33256,7 +33647,7 @@
                     <a:p>
                       <a:pPr algn="ctr"/>
                       <a:r>
-                        <a:rPr sz="919" b="0">
+                        <a:rPr sz="840" b="0">
                           <a:solidFill>
                             <a:srgbClr val="1A1A1A"/>
                           </a:solidFill>
@@ -33281,7 +33672,7 @@
                     <a:p>
                       <a:pPr algn="l"/>
                       <a:r>
-                        <a:rPr sz="919" b="0">
+                        <a:rPr sz="840" b="0">
                           <a:solidFill>
                             <a:srgbClr val="1A1A1A"/>
                           </a:solidFill>
@@ -33304,7 +33695,7 @@
                     <a:p>
                       <a:pPr algn="ctr"/>
                       <a:r>
-                        <a:rPr sz="919" b="0">
+                        <a:rPr sz="840" b="0">
                           <a:solidFill>
                             <a:srgbClr val="1A1A1A"/>
                           </a:solidFill>
@@ -33327,7 +33718,7 @@
                     <a:p>
                       <a:pPr algn="ctr"/>
                       <a:r>
-                        <a:rPr sz="919" b="0">
+                        <a:rPr sz="840" b="0">
                           <a:solidFill>
                             <a:srgbClr val="1A1A1A"/>
                           </a:solidFill>
@@ -33350,7 +33741,30 @@
                     <a:p>
                       <a:pPr algn="ctr"/>
                       <a:r>
-                        <a:rPr sz="919" b="0">
+                        <a:rPr sz="840" b="0">
+                          <a:solidFill>
+                            <a:srgbClr val="1A1A1A"/>
+                          </a:solidFill>
+                          <a:latin typeface="Malgun Gothic"/>
+                        </a:rPr>
+                        <a:t>0.996</a:t>
+                      </a:r>
+                    </a:p>
+                  </a:txBody>
+                  <a:tcPr marL="50800" marR="50800" marT="19050" marB="19050" anchor="ctr">
+                    <a:solidFill>
+                      <a:srgbClr val="F8F8F8"/>
+                    </a:solidFill>
+                  </a:tcPr>
+                </a:tc>
+                <a:tc>
+                  <a:txBody>
+                    <a:bodyPr wrap="square"/>
+                    <a:lstStyle/>
+                    <a:p>
+                      <a:pPr algn="ctr"/>
+                      <a:r>
+                        <a:rPr sz="840" b="0">
                           <a:solidFill>
                             <a:srgbClr val="1A1A1A"/>
                           </a:solidFill>
@@ -33373,7 +33787,7 @@
                     <a:p>
                       <a:pPr algn="ctr"/>
                       <a:r>
-                        <a:rPr sz="919" b="0">
+                        <a:rPr sz="840" b="0">
                           <a:solidFill>
                             <a:srgbClr val="1A1A1A"/>
                           </a:solidFill>
@@ -33396,7 +33810,7 @@
                     <a:p>
                       <a:pPr algn="ctr"/>
                       <a:r>
-                        <a:rPr sz="919" b="0">
+                        <a:rPr sz="840" b="0">
                           <a:solidFill>
                             <a:srgbClr val="1A1A1A"/>
                           </a:solidFill>
@@ -33421,7 +33835,7 @@
                     <a:p>
                       <a:pPr algn="l"/>
                       <a:r>
-                        <a:rPr sz="919" b="0">
+                        <a:rPr sz="840" b="0">
                           <a:solidFill>
                             <a:srgbClr val="1A1A1A"/>
                           </a:solidFill>
@@ -33444,7 +33858,7 @@
                     <a:p>
                       <a:pPr algn="ctr"/>
                       <a:r>
-                        <a:rPr sz="919" b="0">
+                        <a:rPr sz="840" b="0">
                           <a:solidFill>
                             <a:srgbClr val="1A1A1A"/>
                           </a:solidFill>
@@ -33467,7 +33881,7 @@
                     <a:p>
                       <a:pPr algn="ctr"/>
                       <a:r>
-                        <a:rPr sz="919" b="0">
+                        <a:rPr sz="840" b="0">
                           <a:solidFill>
                             <a:srgbClr val="1A1A1A"/>
                           </a:solidFill>
@@ -33490,7 +33904,30 @@
                     <a:p>
                       <a:pPr algn="ctr"/>
                       <a:r>
-                        <a:rPr sz="919" b="0">
+                        <a:rPr sz="840" b="0">
+                          <a:solidFill>
+                            <a:srgbClr val="1A1A1A"/>
+                          </a:solidFill>
+                          <a:latin typeface="Malgun Gothic"/>
+                        </a:rPr>
+                        <a:t>0.974</a:t>
+                      </a:r>
+                    </a:p>
+                  </a:txBody>
+                  <a:tcPr marL="50800" marR="50800" marT="19050" marB="19050" anchor="ctr">
+                    <a:solidFill>
+                      <a:srgbClr val="FFFFFF"/>
+                    </a:solidFill>
+                  </a:tcPr>
+                </a:tc>
+                <a:tc>
+                  <a:txBody>
+                    <a:bodyPr wrap="square"/>
+                    <a:lstStyle/>
+                    <a:p>
+                      <a:pPr algn="ctr"/>
+                      <a:r>
+                        <a:rPr sz="840" b="0">
                           <a:solidFill>
                             <a:srgbClr val="1A1A1A"/>
                           </a:solidFill>
@@ -33513,7 +33950,7 @@
                     <a:p>
                       <a:pPr algn="ctr"/>
                       <a:r>
-                        <a:rPr sz="919" b="0">
+                        <a:rPr sz="840" b="0">
                           <a:solidFill>
                             <a:srgbClr val="1A1A1A"/>
                           </a:solidFill>
@@ -33536,7 +33973,7 @@
                     <a:p>
                       <a:pPr algn="ctr"/>
                       <a:r>
-                        <a:rPr sz="919" b="0">
+                        <a:rPr sz="840" b="0">
                           <a:solidFill>
                             <a:srgbClr val="1A1A1A"/>
                           </a:solidFill>
@@ -33561,7 +33998,7 @@
                     <a:p>
                       <a:pPr algn="l"/>
                       <a:r>
-                        <a:rPr sz="919" b="0">
+                        <a:rPr sz="840" b="0">
                           <a:solidFill>
                             <a:srgbClr val="1A1A1A"/>
                           </a:solidFill>
@@ -33584,7 +34021,7 @@
                     <a:p>
                       <a:pPr algn="ctr"/>
                       <a:r>
-                        <a:rPr sz="919" b="0">
+                        <a:rPr sz="840" b="0">
                           <a:solidFill>
                             <a:srgbClr val="1A1A1A"/>
                           </a:solidFill>
@@ -33607,7 +34044,7 @@
                     <a:p>
                       <a:pPr algn="ctr"/>
                       <a:r>
-                        <a:rPr sz="919" b="0">
+                        <a:rPr sz="840" b="0">
                           <a:solidFill>
                             <a:srgbClr val="1A1A1A"/>
                           </a:solidFill>
@@ -33630,7 +34067,30 @@
                     <a:p>
                       <a:pPr algn="ctr"/>
                       <a:r>
-                        <a:rPr sz="919" b="0">
+                        <a:rPr sz="840" b="0">
+                          <a:solidFill>
+                            <a:srgbClr val="1A1A1A"/>
+                          </a:solidFill>
+                          <a:latin typeface="Malgun Gothic"/>
+                        </a:rPr>
+                        <a:t>-0.091</a:t>
+                      </a:r>
+                    </a:p>
+                  </a:txBody>
+                  <a:tcPr marL="50800" marR="50800" marT="19050" marB="19050" anchor="ctr">
+                    <a:solidFill>
+                      <a:srgbClr val="F8F8F8"/>
+                    </a:solidFill>
+                  </a:tcPr>
+                </a:tc>
+                <a:tc>
+                  <a:txBody>
+                    <a:bodyPr wrap="square"/>
+                    <a:lstStyle/>
+                    <a:p>
+                      <a:pPr algn="ctr"/>
+                      <a:r>
+                        <a:rPr sz="840" b="0">
                           <a:solidFill>
                             <a:srgbClr val="1A1A1A"/>
                           </a:solidFill>
@@ -33653,7 +34113,7 @@
                     <a:p>
                       <a:pPr algn="ctr"/>
                       <a:r>
-                        <a:rPr sz="919" b="0">
+                        <a:rPr sz="840" b="0">
                           <a:solidFill>
                             <a:srgbClr val="1A1A1A"/>
                           </a:solidFill>
@@ -33676,7 +34136,7 @@
                     <a:p>
                       <a:pPr algn="ctr"/>
                       <a:r>
-                        <a:rPr sz="919" b="0">
+                        <a:rPr sz="840" b="0">
                           <a:solidFill>
                             <a:srgbClr val="1A1A1A"/>
                           </a:solidFill>
@@ -33701,7 +34161,7 @@
                     <a:p>
                       <a:pPr algn="l"/>
                       <a:r>
-                        <a:rPr sz="919" b="0">
+                        <a:rPr sz="840" b="0">
                           <a:solidFill>
                             <a:srgbClr val="1A1A1A"/>
                           </a:solidFill>
@@ -33724,7 +34184,7 @@
                     <a:p>
                       <a:pPr algn="ctr"/>
                       <a:r>
-                        <a:rPr sz="919" b="0">
+                        <a:rPr sz="840" b="0">
                           <a:solidFill>
                             <a:srgbClr val="1A1A1A"/>
                           </a:solidFill>
@@ -33747,7 +34207,7 @@
                     <a:p>
                       <a:pPr algn="ctr"/>
                       <a:r>
-                        <a:rPr sz="919" b="0">
+                        <a:rPr sz="840" b="0">
                           <a:solidFill>
                             <a:srgbClr val="1A1A1A"/>
                           </a:solidFill>
@@ -33770,7 +34230,30 @@
                     <a:p>
                       <a:pPr algn="ctr"/>
                       <a:r>
-                        <a:rPr sz="919" b="0">
+                        <a:rPr sz="840" b="0">
+                          <a:solidFill>
+                            <a:srgbClr val="1A1A1A"/>
+                          </a:solidFill>
+                          <a:latin typeface="Malgun Gothic"/>
+                        </a:rPr>
+                        <a:t>0.291</a:t>
+                      </a:r>
+                    </a:p>
+                  </a:txBody>
+                  <a:tcPr marL="50800" marR="50800" marT="19050" marB="19050" anchor="ctr">
+                    <a:solidFill>
+                      <a:srgbClr val="FFFFFF"/>
+                    </a:solidFill>
+                  </a:tcPr>
+                </a:tc>
+                <a:tc>
+                  <a:txBody>
+                    <a:bodyPr wrap="square"/>
+                    <a:lstStyle/>
+                    <a:p>
+                      <a:pPr algn="ctr"/>
+                      <a:r>
+                        <a:rPr sz="840" b="0">
                           <a:solidFill>
                             <a:srgbClr val="1A1A1A"/>
                           </a:solidFill>
@@ -33793,7 +34276,7 @@
                     <a:p>
                       <a:pPr algn="ctr"/>
                       <a:r>
-                        <a:rPr sz="919" b="0">
+                        <a:rPr sz="840" b="0">
                           <a:solidFill>
                             <a:srgbClr val="1A1A1A"/>
                           </a:solidFill>
@@ -33816,7 +34299,7 @@
                     <a:p>
                       <a:pPr algn="ctr"/>
                       <a:r>
-                        <a:rPr sz="919" b="0">
+                        <a:rPr sz="840" b="0">
                           <a:solidFill>
                             <a:srgbClr val="1A1A1A"/>
                           </a:solidFill>
@@ -33841,7 +34324,7 @@
                     <a:p>
                       <a:pPr algn="l"/>
                       <a:r>
-                        <a:rPr sz="919" b="0">
+                        <a:rPr sz="840" b="0">
                           <a:solidFill>
                             <a:srgbClr val="1A1A1A"/>
                           </a:solidFill>
@@ -33864,7 +34347,7 @@
                     <a:p>
                       <a:pPr algn="ctr"/>
                       <a:r>
-                        <a:rPr sz="919" b="0">
+                        <a:rPr sz="840" b="0">
                           <a:solidFill>
                             <a:srgbClr val="1A1A1A"/>
                           </a:solidFill>
@@ -33887,7 +34370,7 @@
                     <a:p>
                       <a:pPr algn="ctr"/>
                       <a:r>
-                        <a:rPr sz="919" b="0">
+                        <a:rPr sz="840" b="0">
                           <a:solidFill>
                             <a:srgbClr val="1A1A1A"/>
                           </a:solidFill>
@@ -33910,7 +34393,30 @@
                     <a:p>
                       <a:pPr algn="ctr"/>
                       <a:r>
-                        <a:rPr sz="919" b="0">
+                        <a:rPr sz="840" b="0">
+                          <a:solidFill>
+                            <a:srgbClr val="1A1A1A"/>
+                          </a:solidFill>
+                          <a:latin typeface="Malgun Gothic"/>
+                        </a:rPr>
+                        <a:t>0.352</a:t>
+                      </a:r>
+                    </a:p>
+                  </a:txBody>
+                  <a:tcPr marL="50800" marR="50800" marT="19050" marB="19050" anchor="ctr">
+                    <a:solidFill>
+                      <a:srgbClr val="F8F8F8"/>
+                    </a:solidFill>
+                  </a:tcPr>
+                </a:tc>
+                <a:tc>
+                  <a:txBody>
+                    <a:bodyPr wrap="square"/>
+                    <a:lstStyle/>
+                    <a:p>
+                      <a:pPr algn="ctr"/>
+                      <a:r>
+                        <a:rPr sz="840" b="0">
                           <a:solidFill>
                             <a:srgbClr val="1A1A1A"/>
                           </a:solidFill>
@@ -33933,7 +34439,7 @@
                     <a:p>
                       <a:pPr algn="ctr"/>
                       <a:r>
-                        <a:rPr sz="919" b="0">
+                        <a:rPr sz="840" b="0">
                           <a:solidFill>
                             <a:srgbClr val="1A1A1A"/>
                           </a:solidFill>
@@ -33956,7 +34462,7 @@
                     <a:p>
                       <a:pPr algn="ctr"/>
                       <a:r>
-                        <a:rPr sz="919" b="0">
+                        <a:rPr sz="840" b="0">
                           <a:solidFill>
                             <a:srgbClr val="1A1A1A"/>
                           </a:solidFill>
@@ -34145,7 +34651,7 @@
               </a:spcAft>
             </a:pPr>
             <a:r>
-              <a:rPr sz="1000" b="1">
+              <a:rPr sz="960" b="1">
                 <a:solidFill>
                   <a:srgbClr val="17508C"/>
                 </a:solidFill>
@@ -34164,13 +34670,13 @@
               </a:spcAft>
             </a:pPr>
             <a:r>
-              <a:rPr sz="1000" b="0">
+              <a:rPr sz="960" b="0">
                 <a:solidFill>
                   <a:srgbClr val="1A1A1A"/>
                 </a:solidFill>
                 <a:latin typeface="Malgun Gothic"/>
               </a:rPr>
-              <a:t>Spearman ρ↑·Kendall τ↑·cosine_d/euclid_d/max_diff↓</a:t>
+              <a:t>Spearman ρ↑·Kendall τ↑·Pearson↑(값-수준 상관)·cosine_d/euclid_d/max_diff↓</a:t>
             </a:r>
           </a:p>
           <a:p>
@@ -34183,13 +34689,13 @@
               </a:spcAft>
             </a:pPr>
             <a:r>
-              <a:rPr sz="1000" b="1">
+              <a:rPr sz="960" b="1">
                 <a:solidFill>
                   <a:srgbClr val="17508C"/>
                 </a:solidFill>
                 <a:latin typeface="Malgun Gothic"/>
               </a:rPr>
-              <a:t>Flirds: in-run ρ=1.000 (1B·3B 동일) — 스케일 불변.</a:t>
+              <a:t>Flirds: ρ=1.000 · Pearson=1.000 (1B·3B) — 순위·값 모두 불변.</a:t>
             </a:r>
           </a:p>
           <a:p>
@@ -34202,13 +34708,13 @@
               </a:spcAft>
             </a:pPr>
             <a:r>
-              <a:rPr sz="1000" b="0">
+              <a:rPr sz="960" b="0">
                 <a:solidFill>
                   <a:srgbClr val="1A1A1A"/>
                 </a:solidFill>
                 <a:latin typeface="Malgun Gothic"/>
               </a:rPr>
-              <a:t>2차항: cosine_d 3.5e-7 vs 1차 4.4e-5 (~125× 타이트).</a:t>
+              <a:t>값-수준 Pearson: GTG 1.00·FedSV 0.96 / ShapleyFL 0.25·FedIF 0.23·ComFedSV 0.09</a:t>
             </a:r>
           </a:p>
           <a:p>
@@ -34221,13 +34727,13 @@
               </a:spcAft>
             </a:pPr>
             <a:r>
-              <a:rPr sz="1000" b="0">
+              <a:rPr sz="960" b="0">
                 <a:solidFill>
                   <a:srgbClr val="1A1A1A"/>
                 </a:solidFill>
                 <a:latin typeface="Malgun Gothic"/>
               </a:rPr>
-              <a:t>loss-heur은 순위만 비기고 cosine은 큼. ShapleyFL·FedIF·ComFedSV는 스케일서 fidelity 약함.</a:t>
+              <a:t>→ 순위 약한 셋이 값-수준(Pearson·cosine)서도 실패. 2차항 cosine 3.5e-7 vs 1차 4.4e-5(~125×).</a:t>
             </a:r>
           </a:p>
         </p:txBody>
@@ -34262,7 +34768,7 @@
                 </a:solidFill>
                 <a:latin typeface="Malgun Gothic"/>
               </a:rPr>
-              <a:t>alpaca-gpt4 20k IID·clean → Banzhaf(2²⁰ 불가)·탐지기(오염 없음)는 미실행(적용범위 표). 출처: runs/track_d/rundirs/* 재집계. 내부코드 standard=std20.</a:t>
+              <a:t>alpaca-gpt4 20k IID·clean → Banzhaf(2²⁰ 불가)·탐지기(오염 없음)는 미실행(적용범위 표). Pearson=값-수준 선형상관(rundir 불변, fidelity.csv 파생). 출처: runs/track_d/rundirs/* + fidelity.csv.</a:t>
             </a:r>
           </a:p>
         </p:txBody>
@@ -34415,7 +34921,7 @@
         <p:spPr>
           <a:xfrm>
             <a:off x="502920" y="1417320"/>
-            <a:ext cx="5486400" cy="274320"/>
+            <a:ext cx="5532120" cy="274320"/>
           </a:xfrm>
           <a:prstGeom prst="rect">
             <a:avLst/>
@@ -34451,7 +34957,7 @@
         </p:nvGraphicFramePr>
         <p:xfrm>
           <a:off x="502920" y="1709928"/>
-          <a:ext cx="5486396" cy="3154680"/>
+          <a:ext cx="5532118" cy="3154680"/>
         </p:xfrm>
         <a:graphic>
           <a:graphicData uri="http://schemas.openxmlformats.org/drawingml/2006/table">
@@ -34460,12 +34966,13 @@
                 <a:tableStyleId>{5940675A-B579-460E-94D1-54222C63F5DA}</a:tableStyleId>
               </a:tblPr>
               <a:tblGrid>
-                <a:gridCol w="1155031"/>
-                <a:gridCol w="907524"/>
-                <a:gridCol w="825022"/>
-                <a:gridCol w="866273"/>
-                <a:gridCol w="866273"/>
-                <a:gridCol w="866273"/>
+                <a:gridCol w="1027511"/>
+                <a:gridCol w="756248"/>
+                <a:gridCol w="723367"/>
+                <a:gridCol w="756248"/>
+                <a:gridCol w="756248"/>
+                <a:gridCol w="756248"/>
+                <a:gridCol w="756248"/>
               </a:tblGrid>
               <a:tr h="315468">
                 <a:tc>
@@ -34475,7 +34982,7 @@
                     <a:p>
                       <a:pPr algn="l"/>
                       <a:r>
-                        <a:rPr sz="919" b="1">
+                        <a:rPr sz="840" b="1">
                           <a:solidFill>
                             <a:srgbClr val="17508C"/>
                           </a:solidFill>
@@ -34498,7 +35005,7 @@
                     <a:p>
                       <a:pPr algn="ctr"/>
                       <a:r>
-                        <a:rPr sz="919" b="1">
+                        <a:rPr sz="840" b="1">
                           <a:solidFill>
                             <a:srgbClr val="17508C"/>
                           </a:solidFill>
@@ -34521,7 +35028,7 @@
                     <a:p>
                       <a:pPr algn="ctr"/>
                       <a:r>
-                        <a:rPr sz="919" b="1">
+                        <a:rPr sz="840" b="1">
                           <a:solidFill>
                             <a:srgbClr val="17508C"/>
                           </a:solidFill>
@@ -34544,12 +35051,35 @@
                     <a:p>
                       <a:pPr algn="ctr"/>
                       <a:r>
-                        <a:rPr sz="919" b="1">
+                        <a:rPr sz="840" b="1">
                           <a:solidFill>
                             <a:srgbClr val="17508C"/>
                           </a:solidFill>
                           <a:latin typeface="Malgun Gothic"/>
                         </a:rPr>
+                        <a:t>Pearson ↑</a:t>
+                      </a:r>
+                    </a:p>
+                  </a:txBody>
+                  <a:tcPr marL="50800" marR="50800" marT="19050" marB="19050" anchor="ctr">
+                    <a:solidFill>
+                      <a:srgbClr val="EFEFEF"/>
+                    </a:solidFill>
+                  </a:tcPr>
+                </a:tc>
+                <a:tc>
+                  <a:txBody>
+                    <a:bodyPr wrap="square"/>
+                    <a:lstStyle/>
+                    <a:p>
+                      <a:pPr algn="ctr"/>
+                      <a:r>
+                        <a:rPr sz="840" b="1">
+                          <a:solidFill>
+                            <a:srgbClr val="17508C"/>
+                          </a:solidFill>
+                          <a:latin typeface="Malgun Gothic"/>
+                        </a:rPr>
                         <a:t>cosine_d ↓</a:t>
                       </a:r>
                     </a:p>
@@ -34567,7 +35097,7 @@
                     <a:p>
                       <a:pPr algn="ctr"/>
                       <a:r>
-                        <a:rPr sz="919" b="1">
+                        <a:rPr sz="840" b="1">
                           <a:solidFill>
                             <a:srgbClr val="17508C"/>
                           </a:solidFill>
@@ -34590,7 +35120,7 @@
                     <a:p>
                       <a:pPr algn="ctr"/>
                       <a:r>
-                        <a:rPr sz="919" b="1">
+                        <a:rPr sz="840" b="1">
                           <a:solidFill>
                             <a:srgbClr val="17508C"/>
                           </a:solidFill>
@@ -34615,7 +35145,7 @@
                     <a:p>
                       <a:pPr algn="l"/>
                       <a:r>
-                        <a:rPr sz="919" b="0">
+                        <a:rPr sz="840" b="0">
                           <a:solidFill>
                             <a:srgbClr val="1A1A1A"/>
                           </a:solidFill>
@@ -34638,7 +35168,7 @@
                     <a:p>
                       <a:pPr algn="ctr"/>
                       <a:r>
-                        <a:rPr sz="919" b="0">
+                        <a:rPr sz="840" b="0">
                           <a:solidFill>
                             <a:srgbClr val="1A1A1A"/>
                           </a:solidFill>
@@ -34661,7 +35191,7 @@
                     <a:p>
                       <a:pPr algn="ctr"/>
                       <a:r>
-                        <a:rPr sz="919" b="0">
+                        <a:rPr sz="840" b="0">
                           <a:solidFill>
                             <a:srgbClr val="1A1A1A"/>
                           </a:solidFill>
@@ -34684,7 +35214,30 @@
                     <a:p>
                       <a:pPr algn="ctr"/>
                       <a:r>
-                        <a:rPr sz="919" b="0">
+                        <a:rPr sz="840" b="0">
+                          <a:solidFill>
+                            <a:srgbClr val="1A1A1A"/>
+                          </a:solidFill>
+                          <a:latin typeface="Malgun Gothic"/>
+                        </a:rPr>
+                        <a:t>1.000</a:t>
+                      </a:r>
+                    </a:p>
+                  </a:txBody>
+                  <a:tcPr marL="50800" marR="50800" marT="19050" marB="19050" anchor="ctr">
+                    <a:solidFill>
+                      <a:srgbClr val="FFFFFF"/>
+                    </a:solidFill>
+                  </a:tcPr>
+                </a:tc>
+                <a:tc>
+                  <a:txBody>
+                    <a:bodyPr wrap="square"/>
+                    <a:lstStyle/>
+                    <a:p>
+                      <a:pPr algn="ctr"/>
+                      <a:r>
+                        <a:rPr sz="840" b="0">
                           <a:solidFill>
                             <a:srgbClr val="1A1A1A"/>
                           </a:solidFill>
@@ -34707,7 +35260,7 @@
                     <a:p>
                       <a:pPr algn="ctr"/>
                       <a:r>
-                        <a:rPr sz="919" b="0">
+                        <a:rPr sz="840" b="0">
                           <a:solidFill>
                             <a:srgbClr val="1A1A1A"/>
                           </a:solidFill>
@@ -34730,7 +35283,7 @@
                     <a:p>
                       <a:pPr algn="ctr"/>
                       <a:r>
-                        <a:rPr sz="919" b="0">
+                        <a:rPr sz="840" b="0">
                           <a:solidFill>
                             <a:srgbClr val="1A1A1A"/>
                           </a:solidFill>
@@ -34755,7 +35308,7 @@
                     <a:p>
                       <a:pPr algn="l"/>
                       <a:r>
-                        <a:rPr sz="919" b="0">
+                        <a:rPr sz="840" b="0">
                           <a:solidFill>
                             <a:srgbClr val="1A1A1A"/>
                           </a:solidFill>
@@ -34778,7 +35331,7 @@
                     <a:p>
                       <a:pPr algn="ctr"/>
                       <a:r>
-                        <a:rPr sz="919" b="0">
+                        <a:rPr sz="840" b="0">
                           <a:solidFill>
                             <a:srgbClr val="1A1A1A"/>
                           </a:solidFill>
@@ -34801,7 +35354,7 @@
                     <a:p>
                       <a:pPr algn="ctr"/>
                       <a:r>
-                        <a:rPr sz="919" b="0">
+                        <a:rPr sz="840" b="0">
                           <a:solidFill>
                             <a:srgbClr val="1A1A1A"/>
                           </a:solidFill>
@@ -34824,7 +35377,30 @@
                     <a:p>
                       <a:pPr algn="ctr"/>
                       <a:r>
-                        <a:rPr sz="919" b="0">
+                        <a:rPr sz="840" b="0">
+                          <a:solidFill>
+                            <a:srgbClr val="1A1A1A"/>
+                          </a:solidFill>
+                          <a:latin typeface="Malgun Gothic"/>
+                        </a:rPr>
+                        <a:t>1.000</a:t>
+                      </a:r>
+                    </a:p>
+                  </a:txBody>
+                  <a:tcPr marL="50800" marR="50800" marT="19050" marB="19050" anchor="ctr">
+                    <a:solidFill>
+                      <a:srgbClr val="F8F8F8"/>
+                    </a:solidFill>
+                  </a:tcPr>
+                </a:tc>
+                <a:tc>
+                  <a:txBody>
+                    <a:bodyPr wrap="square"/>
+                    <a:lstStyle/>
+                    <a:p>
+                      <a:pPr algn="ctr"/>
+                      <a:r>
+                        <a:rPr sz="840" b="0">
                           <a:solidFill>
                             <a:srgbClr val="1A1A1A"/>
                           </a:solidFill>
@@ -34847,7 +35423,7 @@
                     <a:p>
                       <a:pPr algn="ctr"/>
                       <a:r>
-                        <a:rPr sz="919" b="0">
+                        <a:rPr sz="840" b="0">
                           <a:solidFill>
                             <a:srgbClr val="1A1A1A"/>
                           </a:solidFill>
@@ -34870,7 +35446,7 @@
                     <a:p>
                       <a:pPr algn="ctr"/>
                       <a:r>
-                        <a:rPr sz="919" b="0">
+                        <a:rPr sz="840" b="0">
                           <a:solidFill>
                             <a:srgbClr val="1A1A1A"/>
                           </a:solidFill>
@@ -34895,7 +35471,7 @@
                     <a:p>
                       <a:pPr algn="l"/>
                       <a:r>
-                        <a:rPr sz="919" b="0">
+                        <a:rPr sz="840" b="0">
                           <a:solidFill>
                             <a:srgbClr val="1A1A1A"/>
                           </a:solidFill>
@@ -34918,7 +35494,7 @@
                     <a:p>
                       <a:pPr algn="ctr"/>
                       <a:r>
-                        <a:rPr sz="919" b="0">
+                        <a:rPr sz="840" b="0">
                           <a:solidFill>
                             <a:srgbClr val="1A1A1A"/>
                           </a:solidFill>
@@ -34941,7 +35517,7 @@
                     <a:p>
                       <a:pPr algn="ctr"/>
                       <a:r>
-                        <a:rPr sz="919" b="0">
+                        <a:rPr sz="840" b="0">
                           <a:solidFill>
                             <a:srgbClr val="1A1A1A"/>
                           </a:solidFill>
@@ -34964,7 +35540,30 @@
                     <a:p>
                       <a:pPr algn="ctr"/>
                       <a:r>
-                        <a:rPr sz="919" b="0">
+                        <a:rPr sz="840" b="0">
+                          <a:solidFill>
+                            <a:srgbClr val="1A1A1A"/>
+                          </a:solidFill>
+                          <a:latin typeface="Malgun Gothic"/>
+                        </a:rPr>
+                        <a:t>1.000</a:t>
+                      </a:r>
+                    </a:p>
+                  </a:txBody>
+                  <a:tcPr marL="50800" marR="50800" marT="19050" marB="19050" anchor="ctr">
+                    <a:solidFill>
+                      <a:srgbClr val="FFFFFF"/>
+                    </a:solidFill>
+                  </a:tcPr>
+                </a:tc>
+                <a:tc>
+                  <a:txBody>
+                    <a:bodyPr wrap="square"/>
+                    <a:lstStyle/>
+                    <a:p>
+                      <a:pPr algn="ctr"/>
+                      <a:r>
+                        <a:rPr sz="840" b="0">
                           <a:solidFill>
                             <a:srgbClr val="1A1A1A"/>
                           </a:solidFill>
@@ -34987,7 +35586,7 @@
                     <a:p>
                       <a:pPr algn="ctr"/>
                       <a:r>
-                        <a:rPr sz="919" b="0">
+                        <a:rPr sz="840" b="0">
                           <a:solidFill>
                             <a:srgbClr val="1A1A1A"/>
                           </a:solidFill>
@@ -35010,7 +35609,7 @@
                     <a:p>
                       <a:pPr algn="ctr"/>
                       <a:r>
-                        <a:rPr sz="919" b="0">
+                        <a:rPr sz="840" b="0">
                           <a:solidFill>
                             <a:srgbClr val="1A1A1A"/>
                           </a:solidFill>
@@ -35035,7 +35634,7 @@
                     <a:p>
                       <a:pPr algn="l"/>
                       <a:r>
-                        <a:rPr sz="919" b="0">
+                        <a:rPr sz="840" b="0">
                           <a:solidFill>
                             <a:srgbClr val="1A1A1A"/>
                           </a:solidFill>
@@ -35058,7 +35657,7 @@
                     <a:p>
                       <a:pPr algn="ctr"/>
                       <a:r>
-                        <a:rPr sz="919" b="0">
+                        <a:rPr sz="840" b="0">
                           <a:solidFill>
                             <a:srgbClr val="1A1A1A"/>
                           </a:solidFill>
@@ -35081,7 +35680,7 @@
                     <a:p>
                       <a:pPr algn="ctr"/>
                       <a:r>
-                        <a:rPr sz="919" b="0">
+                        <a:rPr sz="840" b="0">
                           <a:solidFill>
                             <a:srgbClr val="1A1A1A"/>
                           </a:solidFill>
@@ -35104,7 +35703,30 @@
                     <a:p>
                       <a:pPr algn="ctr"/>
                       <a:r>
-                        <a:rPr sz="919" b="0">
+                        <a:rPr sz="840" b="0">
+                          <a:solidFill>
+                            <a:srgbClr val="1A1A1A"/>
+                          </a:solidFill>
+                          <a:latin typeface="Malgun Gothic"/>
+                        </a:rPr>
+                        <a:t>1.000</a:t>
+                      </a:r>
+                    </a:p>
+                  </a:txBody>
+                  <a:tcPr marL="50800" marR="50800" marT="19050" marB="19050" anchor="ctr">
+                    <a:solidFill>
+                      <a:srgbClr val="F8F8F8"/>
+                    </a:solidFill>
+                  </a:tcPr>
+                </a:tc>
+                <a:tc>
+                  <a:txBody>
+                    <a:bodyPr wrap="square"/>
+                    <a:lstStyle/>
+                    <a:p>
+                      <a:pPr algn="ctr"/>
+                      <a:r>
+                        <a:rPr sz="840" b="0">
                           <a:solidFill>
                             <a:srgbClr val="1A1A1A"/>
                           </a:solidFill>
@@ -35127,7 +35749,7 @@
                     <a:p>
                       <a:pPr algn="ctr"/>
                       <a:r>
-                        <a:rPr sz="919" b="0">
+                        <a:rPr sz="840" b="0">
                           <a:solidFill>
                             <a:srgbClr val="1A1A1A"/>
                           </a:solidFill>
@@ -35150,7 +35772,7 @@
                     <a:p>
                       <a:pPr algn="ctr"/>
                       <a:r>
-                        <a:rPr sz="919" b="0">
+                        <a:rPr sz="840" b="0">
                           <a:solidFill>
                             <a:srgbClr val="1A1A1A"/>
                           </a:solidFill>
@@ -35175,7 +35797,7 @@
                     <a:p>
                       <a:pPr algn="l"/>
                       <a:r>
-                        <a:rPr sz="919" b="0">
+                        <a:rPr sz="840" b="0">
                           <a:solidFill>
                             <a:srgbClr val="1A1A1A"/>
                           </a:solidFill>
@@ -35198,7 +35820,7 @@
                     <a:p>
                       <a:pPr algn="ctr"/>
                       <a:r>
-                        <a:rPr sz="919" b="0">
+                        <a:rPr sz="840" b="0">
                           <a:solidFill>
                             <a:srgbClr val="1A1A1A"/>
                           </a:solidFill>
@@ -35221,7 +35843,7 @@
                     <a:p>
                       <a:pPr algn="ctr"/>
                       <a:r>
-                        <a:rPr sz="919" b="0">
+                        <a:rPr sz="840" b="0">
                           <a:solidFill>
                             <a:srgbClr val="1A1A1A"/>
                           </a:solidFill>
@@ -35244,7 +35866,30 @@
                     <a:p>
                       <a:pPr algn="ctr"/>
                       <a:r>
-                        <a:rPr sz="919" b="0">
+                        <a:rPr sz="840" b="0">
+                          <a:solidFill>
+                            <a:srgbClr val="1A1A1A"/>
+                          </a:solidFill>
+                          <a:latin typeface="Malgun Gothic"/>
+                        </a:rPr>
+                        <a:t>1.000</a:t>
+                      </a:r>
+                    </a:p>
+                  </a:txBody>
+                  <a:tcPr marL="50800" marR="50800" marT="19050" marB="19050" anchor="ctr">
+                    <a:solidFill>
+                      <a:srgbClr val="FFFFFF"/>
+                    </a:solidFill>
+                  </a:tcPr>
+                </a:tc>
+                <a:tc>
+                  <a:txBody>
+                    <a:bodyPr wrap="square"/>
+                    <a:lstStyle/>
+                    <a:p>
+                      <a:pPr algn="ctr"/>
+                      <a:r>
+                        <a:rPr sz="840" b="0">
                           <a:solidFill>
                             <a:srgbClr val="1A1A1A"/>
                           </a:solidFill>
@@ -35267,7 +35912,7 @@
                     <a:p>
                       <a:pPr algn="ctr"/>
                       <a:r>
-                        <a:rPr sz="919" b="0">
+                        <a:rPr sz="840" b="0">
                           <a:solidFill>
                             <a:srgbClr val="1A1A1A"/>
                           </a:solidFill>
@@ -35290,7 +35935,7 @@
                     <a:p>
                       <a:pPr algn="ctr"/>
                       <a:r>
-                        <a:rPr sz="919" b="0">
+                        <a:rPr sz="840" b="0">
                           <a:solidFill>
                             <a:srgbClr val="1A1A1A"/>
                           </a:solidFill>
@@ -35315,7 +35960,7 @@
                     <a:p>
                       <a:pPr algn="l"/>
                       <a:r>
-                        <a:rPr sz="919" b="0">
+                        <a:rPr sz="840" b="0">
                           <a:solidFill>
                             <a:srgbClr val="1A1A1A"/>
                           </a:solidFill>
@@ -35338,7 +35983,7 @@
                     <a:p>
                       <a:pPr algn="ctr"/>
                       <a:r>
-                        <a:rPr sz="919" b="0">
+                        <a:rPr sz="840" b="0">
                           <a:solidFill>
                             <a:srgbClr val="1A1A1A"/>
                           </a:solidFill>
@@ -35361,7 +36006,7 @@
                     <a:p>
                       <a:pPr algn="ctr"/>
                       <a:r>
-                        <a:rPr sz="919" b="0">
+                        <a:rPr sz="840" b="0">
                           <a:solidFill>
                             <a:srgbClr val="1A1A1A"/>
                           </a:solidFill>
@@ -35384,7 +36029,30 @@
                     <a:p>
                       <a:pPr algn="ctr"/>
                       <a:r>
-                        <a:rPr sz="919" b="0">
+                        <a:rPr sz="840" b="0">
+                          <a:solidFill>
+                            <a:srgbClr val="1A1A1A"/>
+                          </a:solidFill>
+                          <a:latin typeface="Malgun Gothic"/>
+                        </a:rPr>
+                        <a:t>0.824</a:t>
+                      </a:r>
+                    </a:p>
+                  </a:txBody>
+                  <a:tcPr marL="50800" marR="50800" marT="19050" marB="19050" anchor="ctr">
+                    <a:solidFill>
+                      <a:srgbClr val="F8F8F8"/>
+                    </a:solidFill>
+                  </a:tcPr>
+                </a:tc>
+                <a:tc>
+                  <a:txBody>
+                    <a:bodyPr wrap="square"/>
+                    <a:lstStyle/>
+                    <a:p>
+                      <a:pPr algn="ctr"/>
+                      <a:r>
+                        <a:rPr sz="840" b="0">
                           <a:solidFill>
                             <a:srgbClr val="1A1A1A"/>
                           </a:solidFill>
@@ -35407,7 +36075,7 @@
                     <a:p>
                       <a:pPr algn="ctr"/>
                       <a:r>
-                        <a:rPr sz="919" b="0">
+                        <a:rPr sz="840" b="0">
                           <a:solidFill>
                             <a:srgbClr val="1A1A1A"/>
                           </a:solidFill>
@@ -35430,7 +36098,7 @@
                     <a:p>
                       <a:pPr algn="ctr"/>
                       <a:r>
-                        <a:rPr sz="919" b="0">
+                        <a:rPr sz="840" b="0">
                           <a:solidFill>
                             <a:srgbClr val="1A1A1A"/>
                           </a:solidFill>
@@ -35455,7 +36123,7 @@
                     <a:p>
                       <a:pPr algn="l"/>
                       <a:r>
-                        <a:rPr sz="919" b="0">
+                        <a:rPr sz="840" b="0">
                           <a:solidFill>
                             <a:srgbClr val="1A1A1A"/>
                           </a:solidFill>
@@ -35478,7 +36146,7 @@
                     <a:p>
                       <a:pPr algn="ctr"/>
                       <a:r>
-                        <a:rPr sz="919" b="0">
+                        <a:rPr sz="840" b="0">
                           <a:solidFill>
                             <a:srgbClr val="1A1A1A"/>
                           </a:solidFill>
@@ -35501,7 +36169,7 @@
                     <a:p>
                       <a:pPr algn="ctr"/>
                       <a:r>
-                        <a:rPr sz="919" b="0">
+                        <a:rPr sz="840" b="0">
                           <a:solidFill>
                             <a:srgbClr val="1A1A1A"/>
                           </a:solidFill>
@@ -35524,7 +36192,30 @@
                     <a:p>
                       <a:pPr algn="ctr"/>
                       <a:r>
-                        <a:rPr sz="919" b="0">
+                        <a:rPr sz="840" b="0">
+                          <a:solidFill>
+                            <a:srgbClr val="1A1A1A"/>
+                          </a:solidFill>
+                          <a:latin typeface="Malgun Gothic"/>
+                        </a:rPr>
+                        <a:t>0.764</a:t>
+                      </a:r>
+                    </a:p>
+                  </a:txBody>
+                  <a:tcPr marL="50800" marR="50800" marT="19050" marB="19050" anchor="ctr">
+                    <a:solidFill>
+                      <a:srgbClr val="FFFFFF"/>
+                    </a:solidFill>
+                  </a:tcPr>
+                </a:tc>
+                <a:tc>
+                  <a:txBody>
+                    <a:bodyPr wrap="square"/>
+                    <a:lstStyle/>
+                    <a:p>
+                      <a:pPr algn="ctr"/>
+                      <a:r>
+                        <a:rPr sz="840" b="0">
                           <a:solidFill>
                             <a:srgbClr val="1A1A1A"/>
                           </a:solidFill>
@@ -35547,7 +36238,7 @@
                     <a:p>
                       <a:pPr algn="ctr"/>
                       <a:r>
-                        <a:rPr sz="919" b="0">
+                        <a:rPr sz="840" b="0">
                           <a:solidFill>
                             <a:srgbClr val="1A1A1A"/>
                           </a:solidFill>
@@ -35570,7 +36261,7 @@
                     <a:p>
                       <a:pPr algn="ctr"/>
                       <a:r>
-                        <a:rPr sz="919" b="0">
+                        <a:rPr sz="840" b="0">
                           <a:solidFill>
                             <a:srgbClr val="1A1A1A"/>
                           </a:solidFill>
@@ -35595,7 +36286,7 @@
                     <a:p>
                       <a:pPr algn="l"/>
                       <a:r>
-                        <a:rPr sz="919" b="0">
+                        <a:rPr sz="840" b="0">
                           <a:solidFill>
                             <a:srgbClr val="1A1A1A"/>
                           </a:solidFill>
@@ -35618,7 +36309,7 @@
                     <a:p>
                       <a:pPr algn="ctr"/>
                       <a:r>
-                        <a:rPr sz="919" b="0">
+                        <a:rPr sz="840" b="0">
                           <a:solidFill>
                             <a:srgbClr val="1A1A1A"/>
                           </a:solidFill>
@@ -35641,7 +36332,7 @@
                     <a:p>
                       <a:pPr algn="ctr"/>
                       <a:r>
-                        <a:rPr sz="919" b="0">
+                        <a:rPr sz="840" b="0">
                           <a:solidFill>
                             <a:srgbClr val="1A1A1A"/>
                           </a:solidFill>
@@ -35664,7 +36355,30 @@
                     <a:p>
                       <a:pPr algn="ctr"/>
                       <a:r>
-                        <a:rPr sz="919" b="0">
+                        <a:rPr sz="840" b="0">
+                          <a:solidFill>
+                            <a:srgbClr val="1A1A1A"/>
+                          </a:solidFill>
+                          <a:latin typeface="Malgun Gothic"/>
+                        </a:rPr>
+                        <a:t>0.563</a:t>
+                      </a:r>
+                    </a:p>
+                  </a:txBody>
+                  <a:tcPr marL="50800" marR="50800" marT="19050" marB="19050" anchor="ctr">
+                    <a:solidFill>
+                      <a:srgbClr val="F8F8F8"/>
+                    </a:solidFill>
+                  </a:tcPr>
+                </a:tc>
+                <a:tc>
+                  <a:txBody>
+                    <a:bodyPr wrap="square"/>
+                    <a:lstStyle/>
+                    <a:p>
+                      <a:pPr algn="ctr"/>
+                      <a:r>
+                        <a:rPr sz="840" b="0">
                           <a:solidFill>
                             <a:srgbClr val="1A1A1A"/>
                           </a:solidFill>
@@ -35687,7 +36401,7 @@
                     <a:p>
                       <a:pPr algn="ctr"/>
                       <a:r>
-                        <a:rPr sz="919" b="0">
+                        <a:rPr sz="840" b="0">
                           <a:solidFill>
                             <a:srgbClr val="1A1A1A"/>
                           </a:solidFill>
@@ -35710,7 +36424,7 @@
                     <a:p>
                       <a:pPr algn="ctr"/>
                       <a:r>
-                        <a:rPr sz="919" b="0">
+                        <a:rPr sz="840" b="0">
                           <a:solidFill>
                             <a:srgbClr val="1A1A1A"/>
                           </a:solidFill>
@@ -35735,7 +36449,7 @@
                     <a:p>
                       <a:pPr algn="l"/>
                       <a:r>
-                        <a:rPr sz="919" b="0">
+                        <a:rPr sz="840" b="0">
                           <a:solidFill>
                             <a:srgbClr val="1A1A1A"/>
                           </a:solidFill>
@@ -35758,7 +36472,7 @@
                     <a:p>
                       <a:pPr algn="ctr"/>
                       <a:r>
-                        <a:rPr sz="919" b="0">
+                        <a:rPr sz="840" b="0">
                           <a:solidFill>
                             <a:srgbClr val="1A1A1A"/>
                           </a:solidFill>
@@ -35781,7 +36495,7 @@
                     <a:p>
                       <a:pPr algn="ctr"/>
                       <a:r>
-                        <a:rPr sz="919" b="0">
+                        <a:rPr sz="840" b="0">
                           <a:solidFill>
                             <a:srgbClr val="1A1A1A"/>
                           </a:solidFill>
@@ -35804,7 +36518,30 @@
                     <a:p>
                       <a:pPr algn="ctr"/>
                       <a:r>
-                        <a:rPr sz="919" b="0">
+                        <a:rPr sz="840" b="0">
+                          <a:solidFill>
+                            <a:srgbClr val="1A1A1A"/>
+                          </a:solidFill>
+                          <a:latin typeface="Malgun Gothic"/>
+                        </a:rPr>
+                        <a:t>-0.068</a:t>
+                      </a:r>
+                    </a:p>
+                  </a:txBody>
+                  <a:tcPr marL="50800" marR="50800" marT="19050" marB="19050" anchor="ctr">
+                    <a:solidFill>
+                      <a:srgbClr val="FFFFFF"/>
+                    </a:solidFill>
+                  </a:tcPr>
+                </a:tc>
+                <a:tc>
+                  <a:txBody>
+                    <a:bodyPr wrap="square"/>
+                    <a:lstStyle/>
+                    <a:p>
+                      <a:pPr algn="ctr"/>
+                      <a:r>
+                        <a:rPr sz="840" b="0">
                           <a:solidFill>
                             <a:srgbClr val="1A1A1A"/>
                           </a:solidFill>
@@ -35827,7 +36564,7 @@
                     <a:p>
                       <a:pPr algn="ctr"/>
                       <a:r>
-                        <a:rPr sz="919" b="0">
+                        <a:rPr sz="840" b="0">
                           <a:solidFill>
                             <a:srgbClr val="1A1A1A"/>
                           </a:solidFill>
@@ -35850,7 +36587,7 @@
                     <a:p>
                       <a:pPr algn="ctr"/>
                       <a:r>
-                        <a:rPr sz="919" b="0">
+                        <a:rPr sz="840" b="0">
                           <a:solidFill>
                             <a:srgbClr val="1A1A1A"/>
                           </a:solidFill>
@@ -35880,7 +36617,7 @@
         <p:spPr>
           <a:xfrm>
             <a:off x="6172200" y="1417320"/>
-            <a:ext cx="5029200" cy="274320"/>
+            <a:ext cx="5532120" cy="274320"/>
           </a:xfrm>
           <a:prstGeom prst="rect">
             <a:avLst/>
@@ -35916,7 +36653,7 @@
         </p:nvGraphicFramePr>
         <p:xfrm>
           <a:off x="6172200" y="1709928"/>
-          <a:ext cx="5029197" cy="2839212"/>
+          <a:ext cx="5532118" cy="2839212"/>
         </p:xfrm>
         <a:graphic>
           <a:graphicData uri="http://schemas.openxmlformats.org/drawingml/2006/table">
@@ -35925,12 +36662,13 @@
                 <a:tableStyleId>{5940675A-B579-460E-94D1-54222C63F5DA}</a:tableStyleId>
               </a:tblPr>
               <a:tblGrid>
-                <a:gridCol w="1058778"/>
-                <a:gridCol w="831897"/>
-                <a:gridCol w="756270"/>
-                <a:gridCol w="794084"/>
-                <a:gridCol w="794084"/>
-                <a:gridCol w="794084"/>
+                <a:gridCol w="1027511"/>
+                <a:gridCol w="756248"/>
+                <a:gridCol w="723367"/>
+                <a:gridCol w="756248"/>
+                <a:gridCol w="756248"/>
+                <a:gridCol w="756248"/>
+                <a:gridCol w="756248"/>
               </a:tblGrid>
               <a:tr h="315468">
                 <a:tc>
@@ -35940,7 +36678,7 @@
                     <a:p>
                       <a:pPr algn="l"/>
                       <a:r>
-                        <a:rPr sz="919" b="1">
+                        <a:rPr sz="840" b="1">
                           <a:solidFill>
                             <a:srgbClr val="17508C"/>
                           </a:solidFill>
@@ -35963,7 +36701,7 @@
                     <a:p>
                       <a:pPr algn="ctr"/>
                       <a:r>
-                        <a:rPr sz="919" b="1">
+                        <a:rPr sz="840" b="1">
                           <a:solidFill>
                             <a:srgbClr val="17508C"/>
                           </a:solidFill>
@@ -35986,7 +36724,7 @@
                     <a:p>
                       <a:pPr algn="ctr"/>
                       <a:r>
-                        <a:rPr sz="919" b="1">
+                        <a:rPr sz="840" b="1">
                           <a:solidFill>
                             <a:srgbClr val="17508C"/>
                           </a:solidFill>
@@ -36009,12 +36747,35 @@
                     <a:p>
                       <a:pPr algn="ctr"/>
                       <a:r>
-                        <a:rPr sz="919" b="1">
+                        <a:rPr sz="840" b="1">
                           <a:solidFill>
                             <a:srgbClr val="17508C"/>
                           </a:solidFill>
                           <a:latin typeface="Malgun Gothic"/>
                         </a:rPr>
+                        <a:t>Pearson ↑</a:t>
+                      </a:r>
+                    </a:p>
+                  </a:txBody>
+                  <a:tcPr marL="50800" marR="50800" marT="19050" marB="19050" anchor="ctr">
+                    <a:solidFill>
+                      <a:srgbClr val="EFEFEF"/>
+                    </a:solidFill>
+                  </a:tcPr>
+                </a:tc>
+                <a:tc>
+                  <a:txBody>
+                    <a:bodyPr wrap="square"/>
+                    <a:lstStyle/>
+                    <a:p>
+                      <a:pPr algn="ctr"/>
+                      <a:r>
+                        <a:rPr sz="840" b="1">
+                          <a:solidFill>
+                            <a:srgbClr val="17508C"/>
+                          </a:solidFill>
+                          <a:latin typeface="Malgun Gothic"/>
+                        </a:rPr>
                         <a:t>cosine_d ↓</a:t>
                       </a:r>
                     </a:p>
@@ -36032,7 +36793,7 @@
                     <a:p>
                       <a:pPr algn="ctr"/>
                       <a:r>
-                        <a:rPr sz="919" b="1">
+                        <a:rPr sz="840" b="1">
                           <a:solidFill>
                             <a:srgbClr val="17508C"/>
                           </a:solidFill>
@@ -36055,7 +36816,7 @@
                     <a:p>
                       <a:pPr algn="ctr"/>
                       <a:r>
-                        <a:rPr sz="919" b="1">
+                        <a:rPr sz="840" b="1">
                           <a:solidFill>
                             <a:srgbClr val="17508C"/>
                           </a:solidFill>
@@ -36080,7 +36841,7 @@
                     <a:p>
                       <a:pPr algn="l"/>
                       <a:r>
-                        <a:rPr sz="919" b="0">
+                        <a:rPr sz="840" b="0">
                           <a:solidFill>
                             <a:srgbClr val="1A1A1A"/>
                           </a:solidFill>
@@ -36103,7 +36864,7 @@
                     <a:p>
                       <a:pPr algn="ctr"/>
                       <a:r>
-                        <a:rPr sz="919" b="0">
+                        <a:rPr sz="840" b="0">
                           <a:solidFill>
                             <a:srgbClr val="1A1A1A"/>
                           </a:solidFill>
@@ -36126,7 +36887,7 @@
                     <a:p>
                       <a:pPr algn="ctr"/>
                       <a:r>
-                        <a:rPr sz="919" b="0">
+                        <a:rPr sz="840" b="0">
                           <a:solidFill>
                             <a:srgbClr val="1A1A1A"/>
                           </a:solidFill>
@@ -36149,7 +36910,30 @@
                     <a:p>
                       <a:pPr algn="ctr"/>
                       <a:r>
-                        <a:rPr sz="919" b="0">
+                        <a:rPr sz="840" b="0">
+                          <a:solidFill>
+                            <a:srgbClr val="1A1A1A"/>
+                          </a:solidFill>
+                          <a:latin typeface="Malgun Gothic"/>
+                        </a:rPr>
+                        <a:t>1.000</a:t>
+                      </a:r>
+                    </a:p>
+                  </a:txBody>
+                  <a:tcPr marL="50800" marR="50800" marT="19050" marB="19050" anchor="ctr">
+                    <a:solidFill>
+                      <a:srgbClr val="FFFFFF"/>
+                    </a:solidFill>
+                  </a:tcPr>
+                </a:tc>
+                <a:tc>
+                  <a:txBody>
+                    <a:bodyPr wrap="square"/>
+                    <a:lstStyle/>
+                    <a:p>
+                      <a:pPr algn="ctr"/>
+                      <a:r>
+                        <a:rPr sz="840" b="0">
                           <a:solidFill>
                             <a:srgbClr val="1A1A1A"/>
                           </a:solidFill>
@@ -36172,7 +36956,7 @@
                     <a:p>
                       <a:pPr algn="ctr"/>
                       <a:r>
-                        <a:rPr sz="919" b="0">
+                        <a:rPr sz="840" b="0">
                           <a:solidFill>
                             <a:srgbClr val="1A1A1A"/>
                           </a:solidFill>
@@ -36195,7 +36979,7 @@
                     <a:p>
                       <a:pPr algn="ctr"/>
                       <a:r>
-                        <a:rPr sz="919" b="0">
+                        <a:rPr sz="840" b="0">
                           <a:solidFill>
                             <a:srgbClr val="1A1A1A"/>
                           </a:solidFill>
@@ -36220,7 +37004,7 @@
                     <a:p>
                       <a:pPr algn="l"/>
                       <a:r>
-                        <a:rPr sz="919" b="0">
+                        <a:rPr sz="840" b="0">
                           <a:solidFill>
                             <a:srgbClr val="1A1A1A"/>
                           </a:solidFill>
@@ -36243,7 +37027,7 @@
                     <a:p>
                       <a:pPr algn="ctr"/>
                       <a:r>
-                        <a:rPr sz="919" b="0">
+                        <a:rPr sz="840" b="0">
                           <a:solidFill>
                             <a:srgbClr val="1A1A1A"/>
                           </a:solidFill>
@@ -36266,7 +37050,7 @@
                     <a:p>
                       <a:pPr algn="ctr"/>
                       <a:r>
-                        <a:rPr sz="919" b="0">
+                        <a:rPr sz="840" b="0">
                           <a:solidFill>
                             <a:srgbClr val="1A1A1A"/>
                           </a:solidFill>
@@ -36289,7 +37073,30 @@
                     <a:p>
                       <a:pPr algn="ctr"/>
                       <a:r>
-                        <a:rPr sz="919" b="0">
+                        <a:rPr sz="840" b="0">
+                          <a:solidFill>
+                            <a:srgbClr val="1A1A1A"/>
+                          </a:solidFill>
+                          <a:latin typeface="Malgun Gothic"/>
+                        </a:rPr>
+                        <a:t>1.000</a:t>
+                      </a:r>
+                    </a:p>
+                  </a:txBody>
+                  <a:tcPr marL="50800" marR="50800" marT="19050" marB="19050" anchor="ctr">
+                    <a:solidFill>
+                      <a:srgbClr val="F8F8F8"/>
+                    </a:solidFill>
+                  </a:tcPr>
+                </a:tc>
+                <a:tc>
+                  <a:txBody>
+                    <a:bodyPr wrap="square"/>
+                    <a:lstStyle/>
+                    <a:p>
+                      <a:pPr algn="ctr"/>
+                      <a:r>
+                        <a:rPr sz="840" b="0">
                           <a:solidFill>
                             <a:srgbClr val="1A1A1A"/>
                           </a:solidFill>
@@ -36312,7 +37119,7 @@
                     <a:p>
                       <a:pPr algn="ctr"/>
                       <a:r>
-                        <a:rPr sz="919" b="0">
+                        <a:rPr sz="840" b="0">
                           <a:solidFill>
                             <a:srgbClr val="1A1A1A"/>
                           </a:solidFill>
@@ -36335,7 +37142,7 @@
                     <a:p>
                       <a:pPr algn="ctr"/>
                       <a:r>
-                        <a:rPr sz="919" b="0">
+                        <a:rPr sz="840" b="0">
                           <a:solidFill>
                             <a:srgbClr val="1A1A1A"/>
                           </a:solidFill>
@@ -36360,7 +37167,7 @@
                     <a:p>
                       <a:pPr algn="l"/>
                       <a:r>
-                        <a:rPr sz="919" b="0">
+                        <a:rPr sz="840" b="0">
                           <a:solidFill>
                             <a:srgbClr val="1A1A1A"/>
                           </a:solidFill>
@@ -36383,7 +37190,7 @@
                     <a:p>
                       <a:pPr algn="ctr"/>
                       <a:r>
-                        <a:rPr sz="919" b="0">
+                        <a:rPr sz="840" b="0">
                           <a:solidFill>
                             <a:srgbClr val="1A1A1A"/>
                           </a:solidFill>
@@ -36406,7 +37213,7 @@
                     <a:p>
                       <a:pPr algn="ctr"/>
                       <a:r>
-                        <a:rPr sz="919" b="0">
+                        <a:rPr sz="840" b="0">
                           <a:solidFill>
                             <a:srgbClr val="1A1A1A"/>
                           </a:solidFill>
@@ -36429,7 +37236,30 @@
                     <a:p>
                       <a:pPr algn="ctr"/>
                       <a:r>
-                        <a:rPr sz="919" b="0">
+                        <a:rPr sz="840" b="0">
+                          <a:solidFill>
+                            <a:srgbClr val="1A1A1A"/>
+                          </a:solidFill>
+                          <a:latin typeface="Malgun Gothic"/>
+                        </a:rPr>
+                        <a:t>1.000</a:t>
+                      </a:r>
+                    </a:p>
+                  </a:txBody>
+                  <a:tcPr marL="50800" marR="50800" marT="19050" marB="19050" anchor="ctr">
+                    <a:solidFill>
+                      <a:srgbClr val="FFFFFF"/>
+                    </a:solidFill>
+                  </a:tcPr>
+                </a:tc>
+                <a:tc>
+                  <a:txBody>
+                    <a:bodyPr wrap="square"/>
+                    <a:lstStyle/>
+                    <a:p>
+                      <a:pPr algn="ctr"/>
+                      <a:r>
+                        <a:rPr sz="840" b="0">
                           <a:solidFill>
                             <a:srgbClr val="1A1A1A"/>
                           </a:solidFill>
@@ -36452,7 +37282,7 @@
                     <a:p>
                       <a:pPr algn="ctr"/>
                       <a:r>
-                        <a:rPr sz="919" b="0">
+                        <a:rPr sz="840" b="0">
                           <a:solidFill>
                             <a:srgbClr val="1A1A1A"/>
                           </a:solidFill>
@@ -36475,7 +37305,7 @@
                     <a:p>
                       <a:pPr algn="ctr"/>
                       <a:r>
-                        <a:rPr sz="919" b="0">
+                        <a:rPr sz="840" b="0">
                           <a:solidFill>
                             <a:srgbClr val="1A1A1A"/>
                           </a:solidFill>
@@ -36500,7 +37330,7 @@
                     <a:p>
                       <a:pPr algn="l"/>
                       <a:r>
-                        <a:rPr sz="919" b="0">
+                        <a:rPr sz="840" b="0">
                           <a:solidFill>
                             <a:srgbClr val="1A1A1A"/>
                           </a:solidFill>
@@ -36523,7 +37353,7 @@
                     <a:p>
                       <a:pPr algn="ctr"/>
                       <a:r>
-                        <a:rPr sz="919" b="0">
+                        <a:rPr sz="840" b="0">
                           <a:solidFill>
                             <a:srgbClr val="1A1A1A"/>
                           </a:solidFill>
@@ -36546,7 +37376,7 @@
                     <a:p>
                       <a:pPr algn="ctr"/>
                       <a:r>
-                        <a:rPr sz="919" b="0">
+                        <a:rPr sz="840" b="0">
                           <a:solidFill>
                             <a:srgbClr val="1A1A1A"/>
                           </a:solidFill>
@@ -36569,7 +37399,30 @@
                     <a:p>
                       <a:pPr algn="ctr"/>
                       <a:r>
-                        <a:rPr sz="919" b="0">
+                        <a:rPr sz="840" b="0">
+                          <a:solidFill>
+                            <a:srgbClr val="1A1A1A"/>
+                          </a:solidFill>
+                          <a:latin typeface="Malgun Gothic"/>
+                        </a:rPr>
+                        <a:t>0.999</a:t>
+                      </a:r>
+                    </a:p>
+                  </a:txBody>
+                  <a:tcPr marL="50800" marR="50800" marT="19050" marB="19050" anchor="ctr">
+                    <a:solidFill>
+                      <a:srgbClr val="F8F8F8"/>
+                    </a:solidFill>
+                  </a:tcPr>
+                </a:tc>
+                <a:tc>
+                  <a:txBody>
+                    <a:bodyPr wrap="square"/>
+                    <a:lstStyle/>
+                    <a:p>
+                      <a:pPr algn="ctr"/>
+                      <a:r>
+                        <a:rPr sz="840" b="0">
                           <a:solidFill>
                             <a:srgbClr val="1A1A1A"/>
                           </a:solidFill>
@@ -36592,7 +37445,7 @@
                     <a:p>
                       <a:pPr algn="ctr"/>
                       <a:r>
-                        <a:rPr sz="919" b="0">
+                        <a:rPr sz="840" b="0">
                           <a:solidFill>
                             <a:srgbClr val="1A1A1A"/>
                           </a:solidFill>
@@ -36615,7 +37468,7 @@
                     <a:p>
                       <a:pPr algn="ctr"/>
                       <a:r>
-                        <a:rPr sz="919" b="0">
+                        <a:rPr sz="840" b="0">
                           <a:solidFill>
                             <a:srgbClr val="1A1A1A"/>
                           </a:solidFill>
@@ -36640,7 +37493,7 @@
                     <a:p>
                       <a:pPr algn="l"/>
                       <a:r>
-                        <a:rPr sz="919" b="0">
+                        <a:rPr sz="840" b="0">
                           <a:solidFill>
                             <a:srgbClr val="1A1A1A"/>
                           </a:solidFill>
@@ -36663,7 +37516,7 @@
                     <a:p>
                       <a:pPr algn="ctr"/>
                       <a:r>
-                        <a:rPr sz="919" b="0">
+                        <a:rPr sz="840" b="0">
                           <a:solidFill>
                             <a:srgbClr val="1A1A1A"/>
                           </a:solidFill>
@@ -36686,7 +37539,7 @@
                     <a:p>
                       <a:pPr algn="ctr"/>
                       <a:r>
-                        <a:rPr sz="919" b="0">
+                        <a:rPr sz="840" b="0">
                           <a:solidFill>
                             <a:srgbClr val="1A1A1A"/>
                           </a:solidFill>
@@ -36709,7 +37562,30 @@
                     <a:p>
                       <a:pPr algn="ctr"/>
                       <a:r>
-                        <a:rPr sz="919" b="0">
+                        <a:rPr sz="840" b="0">
+                          <a:solidFill>
+                            <a:srgbClr val="1A1A1A"/>
+                          </a:solidFill>
+                          <a:latin typeface="Malgun Gothic"/>
+                        </a:rPr>
+                        <a:t>0.851</a:t>
+                      </a:r>
+                    </a:p>
+                  </a:txBody>
+                  <a:tcPr marL="50800" marR="50800" marT="19050" marB="19050" anchor="ctr">
+                    <a:solidFill>
+                      <a:srgbClr val="FFFFFF"/>
+                    </a:solidFill>
+                  </a:tcPr>
+                </a:tc>
+                <a:tc>
+                  <a:txBody>
+                    <a:bodyPr wrap="square"/>
+                    <a:lstStyle/>
+                    <a:p>
+                      <a:pPr algn="ctr"/>
+                      <a:r>
+                        <a:rPr sz="840" b="0">
                           <a:solidFill>
                             <a:srgbClr val="1A1A1A"/>
                           </a:solidFill>
@@ -36732,7 +37608,7 @@
                     <a:p>
                       <a:pPr algn="ctr"/>
                       <a:r>
-                        <a:rPr sz="919" b="0">
+                        <a:rPr sz="840" b="0">
                           <a:solidFill>
                             <a:srgbClr val="1A1A1A"/>
                           </a:solidFill>
@@ -36755,7 +37631,7 @@
                     <a:p>
                       <a:pPr algn="ctr"/>
                       <a:r>
-                        <a:rPr sz="919" b="0">
+                        <a:rPr sz="840" b="0">
                           <a:solidFill>
                             <a:srgbClr val="1A1A1A"/>
                           </a:solidFill>
@@ -36780,7 +37656,7 @@
                     <a:p>
                       <a:pPr algn="l"/>
                       <a:r>
-                        <a:rPr sz="919" b="0">
+                        <a:rPr sz="840" b="0">
                           <a:solidFill>
                             <a:srgbClr val="1A1A1A"/>
                           </a:solidFill>
@@ -36803,7 +37679,7 @@
                     <a:p>
                       <a:pPr algn="ctr"/>
                       <a:r>
-                        <a:rPr sz="919" b="0">
+                        <a:rPr sz="840" b="0">
                           <a:solidFill>
                             <a:srgbClr val="1A1A1A"/>
                           </a:solidFill>
@@ -36826,7 +37702,7 @@
                     <a:p>
                       <a:pPr algn="ctr"/>
                       <a:r>
-                        <a:rPr sz="919" b="0">
+                        <a:rPr sz="840" b="0">
                           <a:solidFill>
                             <a:srgbClr val="1A1A1A"/>
                           </a:solidFill>
@@ -36849,7 +37725,30 @@
                     <a:p>
                       <a:pPr algn="ctr"/>
                       <a:r>
-                        <a:rPr sz="919" b="0">
+                        <a:rPr sz="840" b="0">
+                          <a:solidFill>
+                            <a:srgbClr val="1A1A1A"/>
+                          </a:solidFill>
+                          <a:latin typeface="Malgun Gothic"/>
+                        </a:rPr>
+                        <a:t>0.128</a:t>
+                      </a:r>
+                    </a:p>
+                  </a:txBody>
+                  <a:tcPr marL="50800" marR="50800" marT="19050" marB="19050" anchor="ctr">
+                    <a:solidFill>
+                      <a:srgbClr val="F8F8F8"/>
+                    </a:solidFill>
+                  </a:tcPr>
+                </a:tc>
+                <a:tc>
+                  <a:txBody>
+                    <a:bodyPr wrap="square"/>
+                    <a:lstStyle/>
+                    <a:p>
+                      <a:pPr algn="ctr"/>
+                      <a:r>
+                        <a:rPr sz="840" b="0">
                           <a:solidFill>
                             <a:srgbClr val="1A1A1A"/>
                           </a:solidFill>
@@ -36872,7 +37771,7 @@
                     <a:p>
                       <a:pPr algn="ctr"/>
                       <a:r>
-                        <a:rPr sz="919" b="0">
+                        <a:rPr sz="840" b="0">
                           <a:solidFill>
                             <a:srgbClr val="1A1A1A"/>
                           </a:solidFill>
@@ -36895,7 +37794,7 @@
                     <a:p>
                       <a:pPr algn="ctr"/>
                       <a:r>
-                        <a:rPr sz="919" b="0">
+                        <a:rPr sz="840" b="0">
                           <a:solidFill>
                             <a:srgbClr val="1A1A1A"/>
                           </a:solidFill>
@@ -36920,7 +37819,7 @@
                     <a:p>
                       <a:pPr algn="l"/>
                       <a:r>
-                        <a:rPr sz="919" b="0">
+                        <a:rPr sz="840" b="0">
                           <a:solidFill>
                             <a:srgbClr val="1A1A1A"/>
                           </a:solidFill>
@@ -36943,7 +37842,7 @@
                     <a:p>
                       <a:pPr algn="ctr"/>
                       <a:r>
-                        <a:rPr sz="919" b="0">
+                        <a:rPr sz="840" b="0">
                           <a:solidFill>
                             <a:srgbClr val="1A1A1A"/>
                           </a:solidFill>
@@ -36966,7 +37865,7 @@
                     <a:p>
                       <a:pPr algn="ctr"/>
                       <a:r>
-                        <a:rPr sz="919" b="0">
+                        <a:rPr sz="840" b="0">
                           <a:solidFill>
                             <a:srgbClr val="1A1A1A"/>
                           </a:solidFill>
@@ -36989,7 +37888,30 @@
                     <a:p>
                       <a:pPr algn="ctr"/>
                       <a:r>
-                        <a:rPr sz="919" b="0">
+                        <a:rPr sz="840" b="0">
+                          <a:solidFill>
+                            <a:srgbClr val="1A1A1A"/>
+                          </a:solidFill>
+                          <a:latin typeface="Malgun Gothic"/>
+                        </a:rPr>
+                        <a:t>0.300</a:t>
+                      </a:r>
+                    </a:p>
+                  </a:txBody>
+                  <a:tcPr marL="50800" marR="50800" marT="19050" marB="19050" anchor="ctr">
+                    <a:solidFill>
+                      <a:srgbClr val="FFFFFF"/>
+                    </a:solidFill>
+                  </a:tcPr>
+                </a:tc>
+                <a:tc>
+                  <a:txBody>
+                    <a:bodyPr wrap="square"/>
+                    <a:lstStyle/>
+                    <a:p>
+                      <a:pPr algn="ctr"/>
+                      <a:r>
+                        <a:rPr sz="840" b="0">
                           <a:solidFill>
                             <a:srgbClr val="1A1A1A"/>
                           </a:solidFill>
@@ -37012,7 +37934,7 @@
                     <a:p>
                       <a:pPr algn="ctr"/>
                       <a:r>
-                        <a:rPr sz="919" b="0">
+                        <a:rPr sz="840" b="0">
                           <a:solidFill>
                             <a:srgbClr val="1A1A1A"/>
                           </a:solidFill>
@@ -37035,7 +37957,7 @@
                     <a:p>
                       <a:pPr algn="ctr"/>
                       <a:r>
-                        <a:rPr sz="919" b="0">
+                        <a:rPr sz="840" b="0">
                           <a:solidFill>
                             <a:srgbClr val="1A1A1A"/>
                           </a:solidFill>
@@ -37060,7 +37982,7 @@
                     <a:p>
                       <a:pPr algn="l"/>
                       <a:r>
-                        <a:rPr sz="919" b="0">
+                        <a:rPr sz="840" b="0">
                           <a:solidFill>
                             <a:srgbClr val="1A1A1A"/>
                           </a:solidFill>
@@ -37083,7 +38005,7 @@
                     <a:p>
                       <a:pPr algn="ctr"/>
                       <a:r>
-                        <a:rPr sz="919" b="0">
+                        <a:rPr sz="840" b="0">
                           <a:solidFill>
                             <a:srgbClr val="1A1A1A"/>
                           </a:solidFill>
@@ -37106,7 +38028,7 @@
                     <a:p>
                       <a:pPr algn="ctr"/>
                       <a:r>
-                        <a:rPr sz="919" b="0">
+                        <a:rPr sz="840" b="0">
                           <a:solidFill>
                             <a:srgbClr val="1A1A1A"/>
                           </a:solidFill>
@@ -37129,7 +38051,30 @@
                     <a:p>
                       <a:pPr algn="ctr"/>
                       <a:r>
-                        <a:rPr sz="919" b="0">
+                        <a:rPr sz="840" b="0">
+                          <a:solidFill>
+                            <a:srgbClr val="1A1A1A"/>
+                          </a:solidFill>
+                          <a:latin typeface="Malgun Gothic"/>
+                        </a:rPr>
+                        <a:t>0.262</a:t>
+                      </a:r>
+                    </a:p>
+                  </a:txBody>
+                  <a:tcPr marL="50800" marR="50800" marT="19050" marB="19050" anchor="ctr">
+                    <a:solidFill>
+                      <a:srgbClr val="F8F8F8"/>
+                    </a:solidFill>
+                  </a:tcPr>
+                </a:tc>
+                <a:tc>
+                  <a:txBody>
+                    <a:bodyPr wrap="square"/>
+                    <a:lstStyle/>
+                    <a:p>
+                      <a:pPr algn="ctr"/>
+                      <a:r>
+                        <a:rPr sz="840" b="0">
                           <a:solidFill>
                             <a:srgbClr val="1A1A1A"/>
                           </a:solidFill>
@@ -37152,7 +38097,7 @@
                     <a:p>
                       <a:pPr algn="ctr"/>
                       <a:r>
-                        <a:rPr sz="919" b="0">
+                        <a:rPr sz="840" b="0">
                           <a:solidFill>
                             <a:srgbClr val="1A1A1A"/>
                           </a:solidFill>
@@ -37175,7 +38120,7 @@
                     <a:p>
                       <a:pPr algn="ctr"/>
                       <a:r>
-                        <a:rPr sz="919" b="0">
+                        <a:rPr sz="840" b="0">
                           <a:solidFill>
                             <a:srgbClr val="1A1A1A"/>
                           </a:solidFill>
@@ -39070,6 +40015,25 @@
                 </a:solidFill>
                 <a:latin typeface="Malgun Gothic"/>
               </a:rPr>
+              <a:t>값-수준 Pearson은 읽기 참조(표는 순위만)</a:t>
+            </a:r>
+          </a:p>
+          <a:p>
+            <a:pPr algn="l">
+              <a:spcBef>
+                <a:spcPts val="0"/>
+              </a:spcBef>
+              <a:spcAft>
+                <a:spcPts val="250"/>
+              </a:spcAft>
+            </a:pPr>
+            <a:r>
+              <a:rPr sz="940" b="0">
+                <a:solidFill>
+                  <a:srgbClr val="1A1A1A"/>
+                </a:solidFill>
+                <a:latin typeface="Malgun Gothic"/>
+              </a:rPr>
               <a:t/>
             </a:r>
           </a:p>
@@ -39146,7 +40110,7 @@
                 </a:solidFill>
                 <a:latin typeface="Malgun Gothic"/>
               </a:rPr>
-              <a:t>  poison: FedSV 0.367·1차 0.000 (Flirds 0.967 유지)</a:t>
+              <a:t>  poison: FedSV ρ0.367·1차 0.000 (Flirds ρ0.967 유지)</a:t>
             </a:r>
           </a:p>
           <a:p>
@@ -39178,13 +40142,13 @@
               </a:spcAft>
             </a:pPr>
             <a:r>
-              <a:rPr sz="940" b="1">
+              <a:rPr sz="940" b="0">
                 <a:solidFill>
                   <a:srgbClr val="17508C"/>
                 </a:solidFill>
                 <a:latin typeface="Malgun Gothic"/>
               </a:rPr>
-              <a:t>→ Flirds·loss-heur는 전 스케일 ρ=1.000 유지;</a:t>
+              <a:t>  값-수준 Pearson(silo poison): Flirds 0.68·1차 -0.95(역상관)</a:t>
             </a:r>
           </a:p>
           <a:p>
@@ -39203,7 +40167,7 @@
                 </a:solidFill>
                 <a:latin typeface="Malgun Gothic"/>
               </a:rPr>
-              <a:t>  MC/변형 Shapley는 N↑·poison서 열화.</a:t>
+              <a:t>→ Flirds·loss-heur 전 스케일 순위·값 유지; MC/변형은 N↑·poison서 열화.</a:t>
             </a:r>
           </a:p>
         </p:txBody>
